--- a/lectures/01-Course-Orientation/CS1910_Course-Orientation_Lecture.pptx
+++ b/lectures/01-Course-Orientation/CS1910_Course-Orientation_Lecture.pptx
@@ -14,21 +14,21 @@
     <p:sldId id="302" r:id="rId5"/>
     <p:sldId id="257" r:id="rId6"/>
     <p:sldId id="280" r:id="rId7"/>
-    <p:sldId id="259" r:id="rId8"/>
-    <p:sldId id="262" r:id="rId9"/>
-    <p:sldId id="263" r:id="rId10"/>
-    <p:sldId id="282" r:id="rId11"/>
-    <p:sldId id="290" r:id="rId12"/>
-    <p:sldId id="260" r:id="rId13"/>
-    <p:sldId id="287" r:id="rId14"/>
-    <p:sldId id="261" r:id="rId15"/>
-    <p:sldId id="291" r:id="rId16"/>
-    <p:sldId id="297" r:id="rId17"/>
-    <p:sldId id="298" r:id="rId18"/>
-    <p:sldId id="288" r:id="rId19"/>
-    <p:sldId id="289" r:id="rId20"/>
-    <p:sldId id="292" r:id="rId21"/>
-    <p:sldId id="301" r:id="rId22"/>
+    <p:sldId id="301" r:id="rId8"/>
+    <p:sldId id="259" r:id="rId9"/>
+    <p:sldId id="262" r:id="rId10"/>
+    <p:sldId id="263" r:id="rId11"/>
+    <p:sldId id="282" r:id="rId12"/>
+    <p:sldId id="290" r:id="rId13"/>
+    <p:sldId id="260" r:id="rId14"/>
+    <p:sldId id="287" r:id="rId15"/>
+    <p:sldId id="261" r:id="rId16"/>
+    <p:sldId id="291" r:id="rId17"/>
+    <p:sldId id="297" r:id="rId18"/>
+    <p:sldId id="298" r:id="rId19"/>
+    <p:sldId id="288" r:id="rId20"/>
+    <p:sldId id="289" r:id="rId21"/>
+    <p:sldId id="292" r:id="rId22"/>
     <p:sldId id="279" r:id="rId23"/>
     <p:sldId id="283" r:id="rId24"/>
     <p:sldId id="294" r:id="rId25"/>
@@ -155,8 +155,7 @@
 <file path=ppt/revisionInfo.xml><?xml version="1.0" encoding="utf-8"?>
 <p1510:revInfo xmlns:a="http://schemas.openxmlformats.org/drawingml/2006/main" xmlns:r="http://schemas.openxmlformats.org/officeDocument/2006/relationships" xmlns:p1510="http://schemas.microsoft.com/office/powerpoint/2015/10/main">
   <p1510:revLst>
-    <p1510:client id="{23612551-739F-4BBF-B824-995B58E55E4B}" v="5" dt="2026-09-03T19:05:35.712"/>
-    <p1510:client id="{BF1BBAB6-5345-40ED-8B74-0897D64622F1}" v="17" dt="2026-09-03T18:19:25.474"/>
+    <p1510:client id="{BF1BBAB6-5345-40ED-8B74-0897D64622F1}" v="1" dt="2026-09-08T13:56:45.890"/>
   </p1510:revLst>
 </p1510:revInfo>
 </file>
@@ -165,26 +164,11 @@
 <pc:chgInfo xmlns:a="http://schemas.openxmlformats.org/drawingml/2006/main" xmlns:r="http://schemas.openxmlformats.org/officeDocument/2006/relationships" xmlns:ac="http://schemas.microsoft.com/office/drawing/2013/main/command" xmlns:pc="http://schemas.microsoft.com/office/powerpoint/2013/main/command">
   <pc:docChgLst>
     <pc:chgData name="Christopher Power" userId="83706efc-52ec-4aad-b93a-e27c6e901a30" providerId="ADAL" clId="{020B0DAE-24A7-40F8-9A5C-565589CDAAC4}"/>
-    <pc:docChg chg="undo custSel delSld modSld">
-      <pc:chgData name="Christopher Power" userId="83706efc-52ec-4aad-b93a-e27c6e901a30" providerId="ADAL" clId="{020B0DAE-24A7-40F8-9A5C-565589CDAAC4}" dt="2026-09-03T19:06:17.511" v="741" actId="20577"/>
+    <pc:docChg chg="undo custSel addSld delSld modSld">
+      <pc:chgData name="Christopher Power" userId="83706efc-52ec-4aad-b93a-e27c6e901a30" providerId="ADAL" clId="{020B0DAE-24A7-40F8-9A5C-565589CDAAC4}" dt="2026-09-08T14:12:54.375" v="686" actId="20577"/>
       <pc:docMkLst>
         <pc:docMk/>
       </pc:docMkLst>
-      <pc:sldChg chg="modSp mod">
-        <pc:chgData name="Christopher Power" userId="83706efc-52ec-4aad-b93a-e27c6e901a30" providerId="ADAL" clId="{020B0DAE-24A7-40F8-9A5C-565589CDAAC4}" dt="2026-09-03T19:06:17.511" v="741" actId="20577"/>
-        <pc:sldMkLst>
-          <pc:docMk/>
-          <pc:sldMk cId="3002068836" sldId="256"/>
-        </pc:sldMkLst>
-        <pc:spChg chg="mod">
-          <ac:chgData name="Christopher Power" userId="83706efc-52ec-4aad-b93a-e27c6e901a30" providerId="ADAL" clId="{020B0DAE-24A7-40F8-9A5C-565589CDAAC4}" dt="2026-09-03T19:06:17.511" v="741" actId="20577"/>
-          <ac:spMkLst>
-            <pc:docMk/>
-            <pc:sldMk cId="3002068836" sldId="256"/>
-            <ac:spMk id="3" creationId="{C5AB9C7C-BEF1-C07A-6A77-DBDD71480AAD}"/>
-          </ac:spMkLst>
-        </pc:spChg>
-      </pc:sldChg>
       <pc:sldChg chg="modSp mod">
         <pc:chgData name="Christopher Power" userId="83706efc-52ec-4aad-b93a-e27c6e901a30" providerId="ADAL" clId="{020B0DAE-24A7-40F8-9A5C-565589CDAAC4}" dt="2026-09-03T18:29:32.288" v="482" actId="20577"/>
         <pc:sldMkLst>
@@ -216,7 +200,7 @@
         </pc:spChg>
       </pc:sldChg>
       <pc:sldChg chg="addSp modSp mod">
-        <pc:chgData name="Christopher Power" userId="83706efc-52ec-4aad-b93a-e27c6e901a30" providerId="ADAL" clId="{020B0DAE-24A7-40F8-9A5C-565589CDAAC4}" dt="2026-09-03T18:26:38.885" v="335" actId="20577"/>
+        <pc:chgData name="Christopher Power" userId="83706efc-52ec-4aad-b93a-e27c6e901a30" providerId="ADAL" clId="{020B0DAE-24A7-40F8-9A5C-565589CDAAC4}" dt="2026-09-08T13:55:52.356" v="675" actId="1076"/>
         <pc:sldMkLst>
           <pc:docMk/>
           <pc:sldMk cId="122268572" sldId="262"/>
@@ -238,7 +222,7 @@
           </ac:spMkLst>
         </pc:spChg>
         <pc:spChg chg="mod">
-          <ac:chgData name="Christopher Power" userId="83706efc-52ec-4aad-b93a-e27c6e901a30" providerId="ADAL" clId="{020B0DAE-24A7-40F8-9A5C-565589CDAAC4}" dt="2026-09-03T18:16:52.746" v="164" actId="20577"/>
+          <ac:chgData name="Christopher Power" userId="83706efc-52ec-4aad-b93a-e27c6e901a30" providerId="ADAL" clId="{020B0DAE-24A7-40F8-9A5C-565589CDAAC4}" dt="2026-09-08T13:55:52.356" v="675" actId="1076"/>
           <ac:spMkLst>
             <pc:docMk/>
             <pc:sldMk cId="122268572" sldId="262"/>
@@ -246,7 +230,7 @@
           </ac:spMkLst>
         </pc:spChg>
         <pc:spChg chg="mod">
-          <ac:chgData name="Christopher Power" userId="83706efc-52ec-4aad-b93a-e27c6e901a30" providerId="ADAL" clId="{020B0DAE-24A7-40F8-9A5C-565589CDAAC4}" dt="2026-09-03T18:26:38.885" v="335" actId="20577"/>
+          <ac:chgData name="Christopher Power" userId="83706efc-52ec-4aad-b93a-e27c6e901a30" providerId="ADAL" clId="{020B0DAE-24A7-40F8-9A5C-565589CDAAC4}" dt="2026-09-08T13:55:52.356" v="675" actId="1076"/>
           <ac:spMkLst>
             <pc:docMk/>
             <pc:sldMk cId="122268572" sldId="262"/>
@@ -269,6 +253,22 @@
             <ac:cxnSpMk id="3" creationId="{3A0A1E92-17C6-9156-053C-1DA2BC43C7F4}"/>
           </ac:cxnSpMkLst>
         </pc:cxnChg>
+        <pc:cxnChg chg="mod">
+          <ac:chgData name="Christopher Power" userId="83706efc-52ec-4aad-b93a-e27c6e901a30" providerId="ADAL" clId="{020B0DAE-24A7-40F8-9A5C-565589CDAAC4}" dt="2026-09-08T13:55:52.356" v="675" actId="1076"/>
+          <ac:cxnSpMkLst>
+            <pc:docMk/>
+            <pc:sldMk cId="122268572" sldId="262"/>
+            <ac:cxnSpMk id="9" creationId="{07FE936D-578C-3B4C-2511-B7B44B9A7995}"/>
+          </ac:cxnSpMkLst>
+        </pc:cxnChg>
+        <pc:cxnChg chg="mod">
+          <ac:chgData name="Christopher Power" userId="83706efc-52ec-4aad-b93a-e27c6e901a30" providerId="ADAL" clId="{020B0DAE-24A7-40F8-9A5C-565589CDAAC4}" dt="2026-09-08T13:55:52.356" v="675" actId="1076"/>
+          <ac:cxnSpMkLst>
+            <pc:docMk/>
+            <pc:sldMk cId="122268572" sldId="262"/>
+            <ac:cxnSpMk id="11" creationId="{507B8169-42B9-CC02-E3CE-5867901C7B36}"/>
+          </ac:cxnSpMkLst>
+        </pc:cxnChg>
       </pc:sldChg>
       <pc:sldChg chg="modSp mod">
         <pc:chgData name="Christopher Power" userId="83706efc-52ec-4aad-b93a-e27c6e901a30" providerId="ADAL" clId="{020B0DAE-24A7-40F8-9A5C-565589CDAAC4}" dt="2026-09-03T18:20:17.878" v="325" actId="20577"/>
@@ -286,26 +286,19 @@
         </pc:spChg>
       </pc:sldChg>
       <pc:sldChg chg="modSp mod">
-        <pc:chgData name="Christopher Power" userId="83706efc-52ec-4aad-b93a-e27c6e901a30" providerId="ADAL" clId="{020B0DAE-24A7-40F8-9A5C-565589CDAAC4}" dt="2026-09-03T19:04:54.969" v="689" actId="27636"/>
+        <pc:chgData name="Christopher Power" userId="83706efc-52ec-4aad-b93a-e27c6e901a30" providerId="ADAL" clId="{020B0DAE-24A7-40F8-9A5C-565589CDAAC4}" dt="2026-09-08T14:12:54.375" v="686" actId="20577"/>
         <pc:sldMkLst>
           <pc:docMk/>
-          <pc:sldMk cId="1144124753" sldId="266"/>
+          <pc:sldMk cId="139064739" sldId="282"/>
         </pc:sldMkLst>
         <pc:spChg chg="mod">
-          <ac:chgData name="Christopher Power" userId="83706efc-52ec-4aad-b93a-e27c6e901a30" providerId="ADAL" clId="{020B0DAE-24A7-40F8-9A5C-565589CDAAC4}" dt="2026-09-03T19:04:54.969" v="689" actId="27636"/>
+          <ac:chgData name="Christopher Power" userId="83706efc-52ec-4aad-b93a-e27c6e901a30" providerId="ADAL" clId="{020B0DAE-24A7-40F8-9A5C-565589CDAAC4}" dt="2026-09-08T14:12:54.375" v="686" actId="20577"/>
           <ac:spMkLst>
             <pc:docMk/>
-            <pc:sldMk cId="1144124753" sldId="266"/>
-            <ac:spMk id="3" creationId="{C9BD3A44-D666-194C-0B46-E1ECA20D95D5}"/>
+            <pc:sldMk cId="139064739" sldId="282"/>
+            <ac:spMk id="3" creationId="{73D8FF82-D0F3-6169-4800-9CD7C67E6D3A}"/>
           </ac:spMkLst>
         </pc:spChg>
-      </pc:sldChg>
-      <pc:sldChg chg="del">
-        <pc:chgData name="Christopher Power" userId="83706efc-52ec-4aad-b93a-e27c6e901a30" providerId="ADAL" clId="{020B0DAE-24A7-40F8-9A5C-565589CDAAC4}" dt="2026-09-03T18:39:43.629" v="674" actId="47"/>
-        <pc:sldMkLst>
-          <pc:docMk/>
-          <pc:sldMk cId="4168177853" sldId="277"/>
-        </pc:sldMkLst>
       </pc:sldChg>
       <pc:sldChg chg="modSp mod">
         <pc:chgData name="Christopher Power" userId="83706efc-52ec-4aad-b93a-e27c6e901a30" providerId="ADAL" clId="{020B0DAE-24A7-40F8-9A5C-565589CDAAC4}" dt="2026-09-03T18:28:18.794" v="354" actId="20577"/>
@@ -397,28 +390,19 @@
           </ac:spMkLst>
         </pc:spChg>
       </pc:sldChg>
-      <pc:sldChg chg="modSp mod">
-        <pc:chgData name="Christopher Power" userId="83706efc-52ec-4aad-b93a-e27c6e901a30" providerId="ADAL" clId="{020B0DAE-24A7-40F8-9A5C-565589CDAAC4}" dt="2026-09-03T18:31:31.261" v="666" actId="1076"/>
+      <pc:sldChg chg="add">
+        <pc:chgData name="Christopher Power" userId="83706efc-52ec-4aad-b93a-e27c6e901a30" providerId="ADAL" clId="{020B0DAE-24A7-40F8-9A5C-565589CDAAC4}" dt="2026-09-08T13:56:45.890" v="677"/>
+        <pc:sldMkLst>
+          <pc:docMk/>
+          <pc:sldMk cId="3312545535" sldId="301"/>
+        </pc:sldMkLst>
+      </pc:sldChg>
+      <pc:sldChg chg="modSp del mod">
+        <pc:chgData name="Christopher Power" userId="83706efc-52ec-4aad-b93a-e27c6e901a30" providerId="ADAL" clId="{020B0DAE-24A7-40F8-9A5C-565589CDAAC4}" dt="2026-09-08T13:56:20.556" v="676" actId="2696"/>
         <pc:sldMkLst>
           <pc:docMk/>
           <pc:sldMk cId="3414665496" sldId="301"/>
         </pc:sldMkLst>
-        <pc:spChg chg="mod">
-          <ac:chgData name="Christopher Power" userId="83706efc-52ec-4aad-b93a-e27c6e901a30" providerId="ADAL" clId="{020B0DAE-24A7-40F8-9A5C-565589CDAAC4}" dt="2026-09-03T18:31:29.152" v="665" actId="1076"/>
-          <ac:spMkLst>
-            <pc:docMk/>
-            <pc:sldMk cId="3414665496" sldId="301"/>
-            <ac:spMk id="4" creationId="{E7CBFD0A-BA31-986B-55F6-5053407B0B94}"/>
-          </ac:spMkLst>
-        </pc:spChg>
-        <pc:spChg chg="mod">
-          <ac:chgData name="Christopher Power" userId="83706efc-52ec-4aad-b93a-e27c6e901a30" providerId="ADAL" clId="{020B0DAE-24A7-40F8-9A5C-565589CDAAC4}" dt="2026-09-03T18:31:31.261" v="666" actId="1076"/>
-          <ac:spMkLst>
-            <pc:docMk/>
-            <pc:sldMk cId="3414665496" sldId="301"/>
-            <ac:spMk id="5" creationId="{05F1B796-D673-9F46-716A-2DE67742298E}"/>
-          </ac:spMkLst>
-        </pc:spChg>
       </pc:sldChg>
       <pc:sldChg chg="delSp modSp mod">
         <pc:chgData name="Christopher Power" userId="83706efc-52ec-4aad-b93a-e27c6e901a30" providerId="ADAL" clId="{020B0DAE-24A7-40F8-9A5C-565589CDAAC4}" dt="2026-09-03T18:16:12.728" v="155" actId="14100"/>
@@ -432,44 +416,6 @@
             <pc:docMk/>
             <pc:sldMk cId="3869190149" sldId="302"/>
             <ac:spMk id="4" creationId="{133821B8-089F-BDC1-5B7C-D34A6AA62BDC}"/>
-          </ac:spMkLst>
-        </pc:spChg>
-        <pc:spChg chg="del mod">
-          <ac:chgData name="Christopher Power" userId="83706efc-52ec-4aad-b93a-e27c6e901a30" providerId="ADAL" clId="{020B0DAE-24A7-40F8-9A5C-565589CDAAC4}" dt="2026-09-03T18:13:15.131" v="15" actId="478"/>
-          <ac:spMkLst>
-            <pc:docMk/>
-            <pc:sldMk cId="3869190149" sldId="302"/>
-            <ac:spMk id="5" creationId="{879FD1B7-91FD-12C1-8726-81861BE9F222}"/>
-          </ac:spMkLst>
-        </pc:spChg>
-        <pc:spChg chg="del mod">
-          <ac:chgData name="Christopher Power" userId="83706efc-52ec-4aad-b93a-e27c6e901a30" providerId="ADAL" clId="{020B0DAE-24A7-40F8-9A5C-565589CDAAC4}" dt="2026-09-03T18:13:20.356" v="16" actId="478"/>
-          <ac:spMkLst>
-            <pc:docMk/>
-            <pc:sldMk cId="3869190149" sldId="302"/>
-            <ac:spMk id="7" creationId="{DB9FA9FD-CC52-3EE2-5FCD-EAA2667B2044}"/>
-          </ac:spMkLst>
-        </pc:spChg>
-      </pc:sldChg>
-      <pc:sldChg chg="del">
-        <pc:chgData name="Christopher Power" userId="83706efc-52ec-4aad-b93a-e27c6e901a30" providerId="ADAL" clId="{020B0DAE-24A7-40F8-9A5C-565589CDAAC4}" dt="2026-09-03T18:32:31.817" v="673" actId="47"/>
-        <pc:sldMkLst>
-          <pc:docMk/>
-          <pc:sldMk cId="68935377" sldId="305"/>
-        </pc:sldMkLst>
-      </pc:sldChg>
-      <pc:sldChg chg="modSp mod">
-        <pc:chgData name="Christopher Power" userId="83706efc-52ec-4aad-b93a-e27c6e901a30" providerId="ADAL" clId="{020B0DAE-24A7-40F8-9A5C-565589CDAAC4}" dt="2026-09-03T19:05:50.920" v="702" actId="15"/>
-        <pc:sldMkLst>
-          <pc:docMk/>
-          <pc:sldMk cId="189958695" sldId="308"/>
-        </pc:sldMkLst>
-        <pc:spChg chg="mod">
-          <ac:chgData name="Christopher Power" userId="83706efc-52ec-4aad-b93a-e27c6e901a30" providerId="ADAL" clId="{020B0DAE-24A7-40F8-9A5C-565589CDAAC4}" dt="2026-09-03T19:05:50.920" v="702" actId="15"/>
-          <ac:spMkLst>
-            <pc:docMk/>
-            <pc:sldMk cId="189958695" sldId="308"/>
-            <ac:spMk id="3" creationId="{027AFA69-B4EE-8AF8-6D2D-6302BDE8E292}"/>
           </ac:spMkLst>
         </pc:spChg>
       </pc:sldChg>
@@ -4250,7 +4196,7 @@
           <a:p>
             <a:fld id="{34AA4B8C-BF6B-4440-8121-9D39C04872C3}" type="datetimeFigureOut">
               <a:rPr lang="en-US" smtClean="0"/>
-              <a:t>9/3/2026</a:t>
+              <a:t>9/8/2026</a:t>
             </a:fld>
             <a:endParaRPr lang="en-US"/>
           </a:p>
@@ -4680,7 +4626,7 @@
           <a:p>
             <a:fld id="{1160EA64-D806-43AC-9DF2-F8C432F32B4C}" type="datetimeFigureOut">
               <a:rPr lang="en-US" dirty="0"/>
-              <a:t>9/3/2026</a:t>
+              <a:t>9/8/2026</a:t>
             </a:fld>
             <a:endParaRPr lang="en-US" dirty="0"/>
           </a:p>
@@ -4846,7 +4792,7 @@
           <a:p>
             <a:fld id="{E9F9C37B-1D36-470B-8223-D6C91242EC14}" type="datetimeFigureOut">
               <a:rPr lang="en-US" dirty="0"/>
-              <a:t>9/3/2026</a:t>
+              <a:t>9/8/2026</a:t>
             </a:fld>
             <a:endParaRPr lang="en-US" dirty="0"/>
           </a:p>
@@ -5021,7 +4967,7 @@
           <a:p>
             <a:fld id="{67C6F52A-A82B-47A2-A83A-8C4C91F2D59F}" type="datetimeFigureOut">
               <a:rPr lang="en-US" dirty="0"/>
-              <a:t>9/3/2026</a:t>
+              <a:t>9/8/2026</a:t>
             </a:fld>
             <a:endParaRPr lang="en-US" dirty="0"/>
           </a:p>
@@ -5186,7 +5132,7 @@
           <a:p>
             <a:fld id="{F070A7B3-6521-4DCA-87E5-044747A908C1}" type="datetimeFigureOut">
               <a:rPr lang="en-US" dirty="0"/>
-              <a:t>9/3/2026</a:t>
+              <a:t>9/8/2026</a:t>
             </a:fld>
             <a:endParaRPr lang="en-US" dirty="0"/>
           </a:p>
@@ -5450,7 +5396,7 @@
           <a:p>
             <a:fld id="{1160EA64-D806-43AC-9DF2-F8C432F32B4C}" type="datetimeFigureOut">
               <a:rPr lang="en-US" dirty="0"/>
-              <a:t>9/3/2026</a:t>
+              <a:t>9/8/2026</a:t>
             </a:fld>
             <a:endParaRPr lang="en-US" dirty="0"/>
           </a:p>
@@ -5678,7 +5624,7 @@
           <a:p>
             <a:fld id="{AB134690-1557-4C89-A502-4959FE7FAD70}" type="datetimeFigureOut">
               <a:rPr lang="en-US" dirty="0"/>
-              <a:t>9/3/2026</a:t>
+              <a:t>9/8/2026</a:t>
             </a:fld>
             <a:endParaRPr lang="en-US" dirty="0"/>
           </a:p>
@@ -6032,7 +5978,7 @@
           <a:p>
             <a:fld id="{4F7D4976-E339-4826-83B7-FBD03F55ECF8}" type="datetimeFigureOut">
               <a:rPr lang="en-US" dirty="0"/>
-              <a:t>9/3/2026</a:t>
+              <a:t>9/8/2026</a:t>
             </a:fld>
             <a:endParaRPr lang="en-US" dirty="0"/>
           </a:p>
@@ -6168,7 +6114,7 @@
           <a:p>
             <a:fld id="{E1037C31-9E7A-4F99-8774-A0E530DE1A42}" type="datetimeFigureOut">
               <a:rPr lang="en-US" dirty="0"/>
-              <a:t>9/3/2026</a:t>
+              <a:t>9/8/2026</a:t>
             </a:fld>
             <a:endParaRPr lang="en-US" dirty="0"/>
           </a:p>
@@ -6258,7 +6204,7 @@
           <a:p>
             <a:fld id="{C278504F-A551-4DE0-9316-4DCD1D8CC752}" type="datetimeFigureOut">
               <a:rPr lang="en-US" dirty="0"/>
-              <a:t>9/3/2026</a:t>
+              <a:t>9/8/2026</a:t>
             </a:fld>
             <a:endParaRPr lang="en-US" dirty="0"/>
           </a:p>
@@ -6610,7 +6556,7 @@
           <a:p>
             <a:fld id="{D1BE4249-C0D0-4B06-8692-E8BB871AF643}" type="datetimeFigureOut">
               <a:rPr lang="en-US" dirty="0"/>
-              <a:t>9/3/2026</a:t>
+              <a:t>9/8/2026</a:t>
             </a:fld>
             <a:endParaRPr lang="en-US" dirty="0"/>
           </a:p>
@@ -6962,7 +6908,7 @@
           <a:p>
             <a:fld id="{042B0DB6-F5C7-45FB-8CF3-31B45F9C2DAC}" type="datetimeFigureOut">
               <a:rPr lang="en-US" dirty="0"/>
-              <a:t>9/3/2026</a:t>
+              <a:t>9/8/2026</a:t>
             </a:fld>
             <a:endParaRPr lang="en-US" dirty="0"/>
           </a:p>
@@ -7199,7 +7145,7 @@
           <a:p>
             <a:fld id="{1160EA64-D806-43AC-9DF2-F8C432F32B4C}" type="datetimeFigureOut">
               <a:rPr lang="en-US" dirty="0"/>
-              <a:t>9/3/2026</a:t>
+              <a:t>9/8/2026</a:t>
             </a:fld>
             <a:endParaRPr lang="en-US" dirty="0"/>
           </a:p>
@@ -7705,38 +7651,40 @@
         </p:spPr>
         <p:txBody>
           <a:bodyPr>
-            <a:normAutofit lnSpcReduction="10000"/>
+            <a:normAutofit fontScale="85000" lnSpcReduction="20000"/>
           </a:bodyPr>
           <a:lstStyle/>
           <a:p>
             <a:r>
               <a:rPr lang="en-CA" dirty="0"/>
+              <a:t>(Course orientation — the "Learning Objectives" slide states course-wide goals rather than a single lecture, so this lecture is framed entirely as an introduction. The CI objectives are realized across the whole term, not achieved in this lecture alone.)</a:t>
+            </a:r>
+          </a:p>
+          <a:p>
+            <a:r>
+              <a:rPr lang="en-CA" dirty="0"/>
               <a:t>Students will be introduced to:</a:t>
             </a:r>
           </a:p>
           <a:p>
-            <a:pPr lvl="1"/>
             <a:r>
               <a:rPr lang="en-CA" dirty="0"/>
               <a:t> The course, the instructors, and how lectures, labs, and homework fit together [—]</a:t>
             </a:r>
           </a:p>
           <a:p>
-            <a:pPr lvl="1"/>
             <a:r>
               <a:rPr lang="en-CA" dirty="0"/>
               <a:t> The syllabus, grading breakdown, and the "pass the tests" requirement [—]</a:t>
             </a:r>
           </a:p>
           <a:p>
-            <a:pPr lvl="1"/>
             <a:r>
               <a:rPr lang="en-CA" dirty="0"/>
               <a:t> Academic integrity expectations, including appropriate and inappropriate use of GenAI [—]</a:t>
             </a:r>
           </a:p>
           <a:p>
-            <a:pPr lvl="1"/>
             <a:r>
               <a:rPr lang="en-CA" dirty="0"/>
               <a:t> The culture of the course: valuing the problem-solving </a:t>
@@ -7751,28 +7699,24 @@
             </a:r>
           </a:p>
           <a:p>
-            <a:pPr lvl="1"/>
             <a:r>
               <a:rPr lang="en-CA" dirty="0"/>
               <a:t> Student resources and supports (accessibility services, office hours, the help centre) [—]</a:t>
             </a:r>
           </a:p>
           <a:p>
-            <a:pPr lvl="1"/>
             <a:r>
               <a:rPr lang="en-CA" dirty="0"/>
               <a:t> Computational thinking as the organizing idea of the course (a preview of Lecture 2) [CI01, CI07]</a:t>
             </a:r>
           </a:p>
           <a:p>
-            <a:pPr lvl="1"/>
             <a:r>
               <a:rPr lang="en-CA" dirty="0"/>
               <a:t> What Computer Science is, using examples (e.g. gaming, 3D animation) to challenge preconceptions [CI07]</a:t>
             </a:r>
           </a:p>
           <a:p>
-            <a:pPr lvl="1"/>
             <a:r>
               <a:rPr lang="en-CA" dirty="0"/>
               <a:t> The tools and environment used in the course (Google </a:t>
@@ -7787,7 +7731,6 @@
             </a:r>
           </a:p>
           <a:p>
-            <a:pPr lvl="1"/>
             <a:r>
               <a:rPr lang="en-CA" dirty="0"/>
               <a:t> What it means to be a "good" programmer: problem solving, abstraction, logical reasoning, creativity [CI01, CI06]</a:t>
@@ -7809,6 +7752,147 @@
 </file>
 
 <file path=ppt/slides/slide10.xml><?xml version="1.0" encoding="utf-8"?>
+<p:sld xmlns:a="http://schemas.openxmlformats.org/drawingml/2006/main" xmlns:r="http://schemas.openxmlformats.org/officeDocument/2006/relationships" xmlns:p="http://schemas.openxmlformats.org/presentationml/2006/main">
+  <p:cSld>
+    <p:spTree>
+      <p:nvGrpSpPr>
+        <p:cNvPr id="1" name=""/>
+        <p:cNvGrpSpPr/>
+        <p:nvPr/>
+      </p:nvGrpSpPr>
+      <p:grpSpPr>
+        <a:xfrm>
+          <a:off x="0" y="0"/>
+          <a:ext cx="0" cy="0"/>
+          <a:chOff x="0" y="0"/>
+          <a:chExt cx="0" cy="0"/>
+        </a:xfrm>
+      </p:grpSpPr>
+      <p:sp>
+        <p:nvSpPr>
+          <p:cNvPr id="2" name="Title 1">
+            <a:extLst>
+              <a:ext uri="{FF2B5EF4-FFF2-40B4-BE49-F238E27FC236}">
+                <a16:creationId xmlns:a16="http://schemas.microsoft.com/office/drawing/2014/main" id="{5CD49EFB-A320-6F43-EFE2-0FCEF4CE506E}"/>
+              </a:ext>
+            </a:extLst>
+          </p:cNvPr>
+          <p:cNvSpPr>
+            <a:spLocks noGrp="1"/>
+          </p:cNvSpPr>
+          <p:nvPr>
+            <p:ph type="title"/>
+          </p:nvPr>
+        </p:nvSpPr>
+        <p:spPr>
+          <a:xfrm>
+            <a:off x="2231136" y="281028"/>
+            <a:ext cx="7729728" cy="1188720"/>
+          </a:xfrm>
+        </p:spPr>
+        <p:txBody>
+          <a:bodyPr/>
+          <a:lstStyle/>
+          <a:p>
+            <a:r>
+              <a:rPr lang="en-US" dirty="0"/>
+              <a:t>Pass the Tests</a:t>
+            </a:r>
+          </a:p>
+        </p:txBody>
+      </p:sp>
+      <p:sp>
+        <p:nvSpPr>
+          <p:cNvPr id="3" name="Content Placeholder 2">
+            <a:extLst>
+              <a:ext uri="{FF2B5EF4-FFF2-40B4-BE49-F238E27FC236}">
+                <a16:creationId xmlns:a16="http://schemas.microsoft.com/office/drawing/2014/main" id="{4D55D105-EFDE-539C-869F-B909057F0592}"/>
+              </a:ext>
+            </a:extLst>
+          </p:cNvPr>
+          <p:cNvSpPr>
+            <a:spLocks noGrp="1"/>
+          </p:cNvSpPr>
+          <p:nvPr>
+            <p:ph idx="1"/>
+          </p:nvPr>
+        </p:nvSpPr>
+        <p:spPr>
+          <a:xfrm>
+            <a:off x="2231136" y="1774919"/>
+            <a:ext cx="7729728" cy="4728431"/>
+          </a:xfrm>
+        </p:spPr>
+        <p:txBody>
+          <a:bodyPr>
+            <a:normAutofit/>
+          </a:bodyPr>
+          <a:lstStyle/>
+          <a:p>
+            <a:r>
+              <a:rPr lang="en-US" dirty="0"/>
+              <a:t>The pass the tests stipulation exists to ensure students moving beyond CS 1910 have demonstrated a basic level of understanding in the course content.</a:t>
+            </a:r>
+          </a:p>
+          <a:p>
+            <a:r>
+              <a:rPr lang="en-US" dirty="0"/>
+              <a:t>It also allows us to allocate a large number of points (35%) towards non-test grades so that students who struggle in testing environments can significantly boost their grade by performing well in other areas.</a:t>
+            </a:r>
+          </a:p>
+          <a:p>
+            <a:r>
+              <a:rPr lang="en-US" dirty="0"/>
+              <a:t>Example:</a:t>
+            </a:r>
+          </a:p>
+          <a:p>
+            <a:pPr lvl="1"/>
+            <a:r>
+              <a:rPr lang="en-US" dirty="0"/>
+              <a:t>Student A : Midterm 1 (40%), Midterm 2 (50%), Final Exam (55%), Labs (80%), Homework (80%), Participation (80%) </a:t>
+            </a:r>
+          </a:p>
+          <a:p>
+            <a:pPr lvl="2"/>
+            <a:r>
+              <a:rPr lang="en-US" dirty="0"/>
+              <a:t>Final Grade: 65% </a:t>
+            </a:r>
+          </a:p>
+          <a:p>
+            <a:pPr lvl="1"/>
+            <a:r>
+              <a:rPr lang="en-US" dirty="0"/>
+              <a:t>Student B: Midterm 1 (40%), Midterm 2 (60%), Final Exam (40%), Labs(100%), Homework (100%), Participation (100%)</a:t>
+            </a:r>
+          </a:p>
+          <a:p>
+            <a:pPr lvl="2"/>
+            <a:r>
+              <a:rPr lang="en-US" dirty="0"/>
+              <a:t>Final Grade 45% (student did not pass the tests portion of the course)</a:t>
+            </a:r>
+          </a:p>
+          <a:p>
+            <a:endParaRPr lang="en-US" dirty="0"/>
+          </a:p>
+        </p:txBody>
+      </p:sp>
+    </p:spTree>
+    <p:extLst>
+      <p:ext uri="{BB962C8B-B14F-4D97-AF65-F5344CB8AC3E}">
+        <p14:creationId xmlns:p14="http://schemas.microsoft.com/office/powerpoint/2010/main" val="1217478224"/>
+      </p:ext>
+    </p:extLst>
+  </p:cSld>
+  <p:clrMapOvr>
+    <a:masterClrMapping/>
+  </p:clrMapOvr>
+</p:sld>
+</file>
+
+<file path=ppt/slides/slide11.xml><?xml version="1.0" encoding="utf-8"?>
 <p:sld xmlns:a="http://schemas.openxmlformats.org/drawingml/2006/main" xmlns:r="http://schemas.openxmlformats.org/officeDocument/2006/relationships" xmlns:p="http://schemas.openxmlformats.org/presentationml/2006/main">
   <p:cSld>
     <p:spTree>
@@ -7888,7 +7972,7 @@
         </p:spPr>
         <p:txBody>
           <a:bodyPr>
-            <a:normAutofit/>
+            <a:normAutofit lnSpcReduction="10000"/>
           </a:bodyPr>
           <a:lstStyle/>
           <a:p>
@@ -7905,13 +7989,21 @@
                   <a:srgbClr val="0070C0"/>
                 </a:solidFill>
               </a:rPr>
-              <a:t>The Pass the tests stipulation considers the tests on aggregate; you must achieve 30% (or more) of your final grade from tests.</a:t>
-            </a:r>
-          </a:p>
-          <a:p>
-            <a:r>
-              <a:rPr lang="en-US" dirty="0"/>
-              <a:t>I did not get 30% or more of my final grade points from tests, but if I add up all of my other grades it averages out to 60%, therefore I pass the course, right?</a:t>
+              <a:t>The Pass the tests stipulation considers the tests on aggregate; you must achieve 32.5% (or more) of your final grade from tests.</a:t>
+            </a:r>
+          </a:p>
+          <a:p>
+            <a:r>
+              <a:rPr lang="en-US" dirty="0"/>
+              <a:t>I did not </a:t>
+            </a:r>
+            <a:r>
+              <a:rPr lang="en-US"/>
+              <a:t>get 32.5% </a:t>
+            </a:r>
+            <a:r>
+              <a:rPr lang="en-US" dirty="0"/>
+              <a:t>or more of my final grade points from tests, but if I add up all of my other grades it averages out to 60%, therefore I pass the course, right?</a:t>
             </a:r>
           </a:p>
           <a:p>
@@ -7987,116 +8079,6 @@
     <p:extLst>
       <p:ext uri="{BB962C8B-B14F-4D97-AF65-F5344CB8AC3E}">
         <p14:creationId xmlns:p14="http://schemas.microsoft.com/office/powerpoint/2010/main" val="139064739"/>
-      </p:ext>
-    </p:extLst>
-  </p:cSld>
-  <p:clrMapOvr>
-    <a:masterClrMapping/>
-  </p:clrMapOvr>
-</p:sld>
-</file>
-
-<file path=ppt/slides/slide11.xml><?xml version="1.0" encoding="utf-8"?>
-<p:sld xmlns:a="http://schemas.openxmlformats.org/drawingml/2006/main" xmlns:r="http://schemas.openxmlformats.org/officeDocument/2006/relationships" xmlns:p="http://schemas.openxmlformats.org/presentationml/2006/main">
-  <p:cSld>
-    <p:spTree>
-      <p:nvGrpSpPr>
-        <p:cNvPr id="1" name=""/>
-        <p:cNvGrpSpPr/>
-        <p:nvPr/>
-      </p:nvGrpSpPr>
-      <p:grpSpPr>
-        <a:xfrm>
-          <a:off x="0" y="0"/>
-          <a:ext cx="0" cy="0"/>
-          <a:chOff x="0" y="0"/>
-          <a:chExt cx="0" cy="0"/>
-        </a:xfrm>
-      </p:grpSpPr>
-      <p:sp>
-        <p:nvSpPr>
-          <p:cNvPr id="2" name="Title 1">
-            <a:extLst>
-              <a:ext uri="{FF2B5EF4-FFF2-40B4-BE49-F238E27FC236}">
-                <a16:creationId xmlns:a16="http://schemas.microsoft.com/office/drawing/2014/main" id="{75F36119-F120-305F-ECB3-EBA73CE17D4C}"/>
-              </a:ext>
-            </a:extLst>
-          </p:cNvPr>
-          <p:cNvSpPr>
-            <a:spLocks noGrp="1"/>
-          </p:cNvSpPr>
-          <p:nvPr>
-            <p:ph type="title"/>
-          </p:nvPr>
-        </p:nvSpPr>
-        <p:spPr/>
-        <p:txBody>
-          <a:bodyPr/>
-          <a:lstStyle/>
-          <a:p>
-            <a:r>
-              <a:rPr lang="en-US" dirty="0"/>
-              <a:t>Midterm Tests</a:t>
-            </a:r>
-          </a:p>
-        </p:txBody>
-      </p:sp>
-      <p:sp>
-        <p:nvSpPr>
-          <p:cNvPr id="3" name="Content Placeholder 2">
-            <a:extLst>
-              <a:ext uri="{FF2B5EF4-FFF2-40B4-BE49-F238E27FC236}">
-                <a16:creationId xmlns:a16="http://schemas.microsoft.com/office/drawing/2014/main" id="{ABA4AC3A-BB9D-324C-CE24-4D014370D9F4}"/>
-              </a:ext>
-            </a:extLst>
-          </p:cNvPr>
-          <p:cNvSpPr>
-            <a:spLocks noGrp="1"/>
-          </p:cNvSpPr>
-          <p:nvPr>
-            <p:ph idx="1"/>
-          </p:nvPr>
-        </p:nvSpPr>
-        <p:spPr/>
-        <p:txBody>
-          <a:bodyPr/>
-          <a:lstStyle/>
-          <a:p>
-            <a:r>
-              <a:rPr lang="en-US" dirty="0"/>
-              <a:t>Written on paper during regular class time</a:t>
-            </a:r>
-          </a:p>
-          <a:p>
-            <a:r>
-              <a:rPr lang="en-US" dirty="0"/>
-              <a:t>Dates are posted in the syllabus</a:t>
-            </a:r>
-          </a:p>
-          <a:p>
-            <a:r>
-              <a:rPr lang="en-US" dirty="0"/>
-              <a:t>May consist of multiple choice, short answer, long answer or coding </a:t>
-            </a:r>
-          </a:p>
-          <a:p>
-            <a:r>
-              <a:rPr lang="en-US" dirty="0"/>
-              <a:t>Try at home questions, homework, labs, lectures and textbook materials are all considered as potential question materials</a:t>
-            </a:r>
-          </a:p>
-          <a:p>
-            <a:endParaRPr lang="en-US" dirty="0"/>
-          </a:p>
-          <a:p>
-            <a:endParaRPr lang="en-US" dirty="0"/>
-          </a:p>
-        </p:txBody>
-      </p:sp>
-    </p:spTree>
-    <p:extLst>
-      <p:ext uri="{BB962C8B-B14F-4D97-AF65-F5344CB8AC3E}">
-        <p14:creationId xmlns:p14="http://schemas.microsoft.com/office/powerpoint/2010/main" val="4006704977"/>
       </p:ext>
     </p:extLst>
   </p:cSld>
@@ -8128,6 +8110,116 @@
           <p:cNvPr id="2" name="Title 1">
             <a:extLst>
               <a:ext uri="{FF2B5EF4-FFF2-40B4-BE49-F238E27FC236}">
+                <a16:creationId xmlns:a16="http://schemas.microsoft.com/office/drawing/2014/main" id="{75F36119-F120-305F-ECB3-EBA73CE17D4C}"/>
+              </a:ext>
+            </a:extLst>
+          </p:cNvPr>
+          <p:cNvSpPr>
+            <a:spLocks noGrp="1"/>
+          </p:cNvSpPr>
+          <p:nvPr>
+            <p:ph type="title"/>
+          </p:nvPr>
+        </p:nvSpPr>
+        <p:spPr/>
+        <p:txBody>
+          <a:bodyPr/>
+          <a:lstStyle/>
+          <a:p>
+            <a:r>
+              <a:rPr lang="en-US" dirty="0"/>
+              <a:t>Midterm Tests</a:t>
+            </a:r>
+          </a:p>
+        </p:txBody>
+      </p:sp>
+      <p:sp>
+        <p:nvSpPr>
+          <p:cNvPr id="3" name="Content Placeholder 2">
+            <a:extLst>
+              <a:ext uri="{FF2B5EF4-FFF2-40B4-BE49-F238E27FC236}">
+                <a16:creationId xmlns:a16="http://schemas.microsoft.com/office/drawing/2014/main" id="{ABA4AC3A-BB9D-324C-CE24-4D014370D9F4}"/>
+              </a:ext>
+            </a:extLst>
+          </p:cNvPr>
+          <p:cNvSpPr>
+            <a:spLocks noGrp="1"/>
+          </p:cNvSpPr>
+          <p:nvPr>
+            <p:ph idx="1"/>
+          </p:nvPr>
+        </p:nvSpPr>
+        <p:spPr/>
+        <p:txBody>
+          <a:bodyPr/>
+          <a:lstStyle/>
+          <a:p>
+            <a:r>
+              <a:rPr lang="en-US" dirty="0"/>
+              <a:t>Written on paper during regular class time</a:t>
+            </a:r>
+          </a:p>
+          <a:p>
+            <a:r>
+              <a:rPr lang="en-US" dirty="0"/>
+              <a:t>Dates are posted in the syllabus</a:t>
+            </a:r>
+          </a:p>
+          <a:p>
+            <a:r>
+              <a:rPr lang="en-US" dirty="0"/>
+              <a:t>May consist of multiple choice, short answer, long answer or coding </a:t>
+            </a:r>
+          </a:p>
+          <a:p>
+            <a:r>
+              <a:rPr lang="en-US" dirty="0"/>
+              <a:t>Try at home questions, homework, labs, lectures and textbook materials are all considered as potential question materials</a:t>
+            </a:r>
+          </a:p>
+          <a:p>
+            <a:endParaRPr lang="en-US" dirty="0"/>
+          </a:p>
+          <a:p>
+            <a:endParaRPr lang="en-US" dirty="0"/>
+          </a:p>
+        </p:txBody>
+      </p:sp>
+    </p:spTree>
+    <p:extLst>
+      <p:ext uri="{BB962C8B-B14F-4D97-AF65-F5344CB8AC3E}">
+        <p14:creationId xmlns:p14="http://schemas.microsoft.com/office/powerpoint/2010/main" val="4006704977"/>
+      </p:ext>
+    </p:extLst>
+  </p:cSld>
+  <p:clrMapOvr>
+    <a:masterClrMapping/>
+  </p:clrMapOvr>
+</p:sld>
+</file>
+
+<file path=ppt/slides/slide13.xml><?xml version="1.0" encoding="utf-8"?>
+<p:sld xmlns:a="http://schemas.openxmlformats.org/drawingml/2006/main" xmlns:r="http://schemas.openxmlformats.org/officeDocument/2006/relationships" xmlns:p="http://schemas.openxmlformats.org/presentationml/2006/main">
+  <p:cSld>
+    <p:spTree>
+      <p:nvGrpSpPr>
+        <p:cNvPr id="1" name=""/>
+        <p:cNvGrpSpPr/>
+        <p:nvPr/>
+      </p:nvGrpSpPr>
+      <p:grpSpPr>
+        <a:xfrm>
+          <a:off x="0" y="0"/>
+          <a:ext cx="0" cy="0"/>
+          <a:chOff x="0" y="0"/>
+          <a:chExt cx="0" cy="0"/>
+        </a:xfrm>
+      </p:grpSpPr>
+      <p:sp>
+        <p:nvSpPr>
+          <p:cNvPr id="2" name="Title 1">
+            <a:extLst>
+              <a:ext uri="{FF2B5EF4-FFF2-40B4-BE49-F238E27FC236}">
                 <a16:creationId xmlns:a16="http://schemas.microsoft.com/office/drawing/2014/main" id="{7212C0CB-A99E-CBB4-74BB-52142F0F51C3}"/>
               </a:ext>
             </a:extLst>
@@ -8242,7 +8334,7 @@
 </p:sld>
 </file>
 
-<file path=ppt/slides/slide13.xml><?xml version="1.0" encoding="utf-8"?>
+<file path=ppt/slides/slide14.xml><?xml version="1.0" encoding="utf-8"?>
 <p:sld xmlns:a="http://schemas.openxmlformats.org/drawingml/2006/main" xmlns:r="http://schemas.openxmlformats.org/officeDocument/2006/relationships" xmlns:p="http://schemas.openxmlformats.org/presentationml/2006/main">
   <p:cSld>
     <p:bg>
@@ -8590,123 +8682,6 @@
 </p:sld>
 </file>
 
-<file path=ppt/slides/slide14.xml><?xml version="1.0" encoding="utf-8"?>
-<p:sld xmlns:a="http://schemas.openxmlformats.org/drawingml/2006/main" xmlns:r="http://schemas.openxmlformats.org/officeDocument/2006/relationships" xmlns:p="http://schemas.openxmlformats.org/presentationml/2006/main">
-  <p:cSld>
-    <p:spTree>
-      <p:nvGrpSpPr>
-        <p:cNvPr id="1" name=""/>
-        <p:cNvGrpSpPr/>
-        <p:nvPr/>
-      </p:nvGrpSpPr>
-      <p:grpSpPr>
-        <a:xfrm>
-          <a:off x="0" y="0"/>
-          <a:ext cx="0" cy="0"/>
-          <a:chOff x="0" y="0"/>
-          <a:chExt cx="0" cy="0"/>
-        </a:xfrm>
-      </p:grpSpPr>
-      <p:sp>
-        <p:nvSpPr>
-          <p:cNvPr id="2" name="Title 1">
-            <a:extLst>
-              <a:ext uri="{FF2B5EF4-FFF2-40B4-BE49-F238E27FC236}">
-                <a16:creationId xmlns:a16="http://schemas.microsoft.com/office/drawing/2014/main" id="{0925B17B-643D-0FE6-D145-F8F7D5FFC8CD}"/>
-              </a:ext>
-            </a:extLst>
-          </p:cNvPr>
-          <p:cNvSpPr>
-            <a:spLocks noGrp="1"/>
-          </p:cNvSpPr>
-          <p:nvPr>
-            <p:ph type="title"/>
-          </p:nvPr>
-        </p:nvSpPr>
-        <p:spPr/>
-        <p:txBody>
-          <a:bodyPr/>
-          <a:lstStyle/>
-          <a:p>
-            <a:r>
-              <a:rPr lang="en-US" dirty="0"/>
-              <a:t>Accessibility</a:t>
-            </a:r>
-          </a:p>
-        </p:txBody>
-      </p:sp>
-      <p:sp>
-        <p:nvSpPr>
-          <p:cNvPr id="3" name="Content Placeholder 2">
-            <a:extLst>
-              <a:ext uri="{FF2B5EF4-FFF2-40B4-BE49-F238E27FC236}">
-                <a16:creationId xmlns:a16="http://schemas.microsoft.com/office/drawing/2014/main" id="{C4CC7416-BD23-B305-0133-20145A8FEAFA}"/>
-              </a:ext>
-            </a:extLst>
-          </p:cNvPr>
-          <p:cNvSpPr>
-            <a:spLocks noGrp="1"/>
-          </p:cNvSpPr>
-          <p:nvPr>
-            <p:ph idx="1"/>
-          </p:nvPr>
-        </p:nvSpPr>
-        <p:spPr/>
-        <p:txBody>
-          <a:bodyPr>
-            <a:normAutofit lnSpcReduction="10000"/>
-          </a:bodyPr>
-          <a:lstStyle/>
-          <a:p>
-            <a:r>
-              <a:rPr lang="en-US" dirty="0"/>
-              <a:t>For those students who may require accommodations for portions of the course, it is your responsibility to register with student services </a:t>
-            </a:r>
-          </a:p>
-          <a:p>
-            <a:pPr lvl="1"/>
-            <a:r>
-              <a:rPr lang="en-US" dirty="0"/>
-              <a:t>Accessibility services will contact the professor to communicate appropriate accommodations </a:t>
-            </a:r>
-          </a:p>
-          <a:p>
-            <a:pPr lvl="1"/>
-            <a:r>
-              <a:rPr lang="en-US" dirty="0">
-                <a:hlinkClick r:id="rId2"/>
-              </a:rPr>
-              <a:t>https://www.upei.ca/accessibility</a:t>
-            </a:r>
-            <a:endParaRPr lang="en-US" dirty="0"/>
-          </a:p>
-          <a:p>
-            <a:r>
-              <a:rPr lang="en-US" dirty="0"/>
-              <a:t>For any aspects of the course – lecture, labs, assignments and tests - please come have a discussion accommodations with us to identify what alternatives will work best for you</a:t>
-            </a:r>
-          </a:p>
-          <a:p>
-            <a:r>
-              <a:rPr lang="en-US" dirty="0"/>
-              <a:t>Both midterms are already in the accommodate system already, and you can register for them right now!</a:t>
-            </a:r>
-          </a:p>
-        </p:txBody>
-      </p:sp>
-    </p:spTree>
-    <p:extLst>
-      <p:ext uri="{BB962C8B-B14F-4D97-AF65-F5344CB8AC3E}">
-        <p14:creationId xmlns:p14="http://schemas.microsoft.com/office/powerpoint/2010/main" val="2350308870"/>
-      </p:ext>
-    </p:extLst>
-  </p:cSld>
-  <p:clrMapOvr>
-    <a:masterClrMapping/>
-  </p:clrMapOvr>
-</p:sld>
-</file>
-
 <file path=ppt/slides/slide15.xml><?xml version="1.0" encoding="utf-8"?>
 <p:sld xmlns:a="http://schemas.openxmlformats.org/drawingml/2006/main" xmlns:r="http://schemas.openxmlformats.org/officeDocument/2006/relationships" xmlns:p="http://schemas.openxmlformats.org/presentationml/2006/main">
   <p:cSld>
@@ -8729,6 +8704,123 @@
           <p:cNvPr id="2" name="Title 1">
             <a:extLst>
               <a:ext uri="{FF2B5EF4-FFF2-40B4-BE49-F238E27FC236}">
+                <a16:creationId xmlns:a16="http://schemas.microsoft.com/office/drawing/2014/main" id="{0925B17B-643D-0FE6-D145-F8F7D5FFC8CD}"/>
+              </a:ext>
+            </a:extLst>
+          </p:cNvPr>
+          <p:cNvSpPr>
+            <a:spLocks noGrp="1"/>
+          </p:cNvSpPr>
+          <p:nvPr>
+            <p:ph type="title"/>
+          </p:nvPr>
+        </p:nvSpPr>
+        <p:spPr/>
+        <p:txBody>
+          <a:bodyPr/>
+          <a:lstStyle/>
+          <a:p>
+            <a:r>
+              <a:rPr lang="en-US" dirty="0"/>
+              <a:t>Accessibility</a:t>
+            </a:r>
+          </a:p>
+        </p:txBody>
+      </p:sp>
+      <p:sp>
+        <p:nvSpPr>
+          <p:cNvPr id="3" name="Content Placeholder 2">
+            <a:extLst>
+              <a:ext uri="{FF2B5EF4-FFF2-40B4-BE49-F238E27FC236}">
+                <a16:creationId xmlns:a16="http://schemas.microsoft.com/office/drawing/2014/main" id="{C4CC7416-BD23-B305-0133-20145A8FEAFA}"/>
+              </a:ext>
+            </a:extLst>
+          </p:cNvPr>
+          <p:cNvSpPr>
+            <a:spLocks noGrp="1"/>
+          </p:cNvSpPr>
+          <p:nvPr>
+            <p:ph idx="1"/>
+          </p:nvPr>
+        </p:nvSpPr>
+        <p:spPr/>
+        <p:txBody>
+          <a:bodyPr>
+            <a:normAutofit lnSpcReduction="10000"/>
+          </a:bodyPr>
+          <a:lstStyle/>
+          <a:p>
+            <a:r>
+              <a:rPr lang="en-US" dirty="0"/>
+              <a:t>For those students who may require accommodations for portions of the course, it is your responsibility to register with student services </a:t>
+            </a:r>
+          </a:p>
+          <a:p>
+            <a:pPr lvl="1"/>
+            <a:r>
+              <a:rPr lang="en-US" dirty="0"/>
+              <a:t>Accessibility services will contact the professor to communicate appropriate accommodations </a:t>
+            </a:r>
+          </a:p>
+          <a:p>
+            <a:pPr lvl="1"/>
+            <a:r>
+              <a:rPr lang="en-US" dirty="0">
+                <a:hlinkClick r:id="rId2"/>
+              </a:rPr>
+              <a:t>https://www.upei.ca/accessibility</a:t>
+            </a:r>
+            <a:endParaRPr lang="en-US" dirty="0"/>
+          </a:p>
+          <a:p>
+            <a:r>
+              <a:rPr lang="en-US" dirty="0"/>
+              <a:t>For any aspects of the course – lecture, labs, assignments and tests - please come have a discussion accommodations with us to identify what alternatives will work best for you</a:t>
+            </a:r>
+          </a:p>
+          <a:p>
+            <a:r>
+              <a:rPr lang="en-US" dirty="0"/>
+              <a:t>Both midterms are already in the accommodate system already, and you can register for them right now!</a:t>
+            </a:r>
+          </a:p>
+        </p:txBody>
+      </p:sp>
+    </p:spTree>
+    <p:extLst>
+      <p:ext uri="{BB962C8B-B14F-4D97-AF65-F5344CB8AC3E}">
+        <p14:creationId xmlns:p14="http://schemas.microsoft.com/office/powerpoint/2010/main" val="2350308870"/>
+      </p:ext>
+    </p:extLst>
+  </p:cSld>
+  <p:clrMapOvr>
+    <a:masterClrMapping/>
+  </p:clrMapOvr>
+</p:sld>
+</file>
+
+<file path=ppt/slides/slide16.xml><?xml version="1.0" encoding="utf-8"?>
+<p:sld xmlns:a="http://schemas.openxmlformats.org/drawingml/2006/main" xmlns:r="http://schemas.openxmlformats.org/officeDocument/2006/relationships" xmlns:p="http://schemas.openxmlformats.org/presentationml/2006/main">
+  <p:cSld>
+    <p:spTree>
+      <p:nvGrpSpPr>
+        <p:cNvPr id="1" name=""/>
+        <p:cNvGrpSpPr/>
+        <p:nvPr/>
+      </p:nvGrpSpPr>
+      <p:grpSpPr>
+        <a:xfrm>
+          <a:off x="0" y="0"/>
+          <a:ext cx="0" cy="0"/>
+          <a:chOff x="0" y="0"/>
+          <a:chExt cx="0" cy="0"/>
+        </a:xfrm>
+      </p:grpSpPr>
+      <p:sp>
+        <p:nvSpPr>
+          <p:cNvPr id="2" name="Title 1">
+            <a:extLst>
+              <a:ext uri="{FF2B5EF4-FFF2-40B4-BE49-F238E27FC236}">
                 <a16:creationId xmlns:a16="http://schemas.microsoft.com/office/drawing/2014/main" id="{4C89105C-76A1-37BF-4528-D50CD3BA3F59}"/>
               </a:ext>
             </a:extLst>
@@ -8858,7 +8950,7 @@
 </p:sld>
 </file>
 
-<file path=ppt/slides/slide16.xml><?xml version="1.0" encoding="utf-8"?>
+<file path=ppt/slides/slide17.xml><?xml version="1.0" encoding="utf-8"?>
 <p:sld xmlns:a="http://schemas.openxmlformats.org/drawingml/2006/main" xmlns:r="http://schemas.openxmlformats.org/officeDocument/2006/relationships" xmlns:p="http://schemas.openxmlformats.org/presentationml/2006/main">
   <p:cSld>
     <p:bg>
@@ -9221,7 +9313,7 @@
 </p:sld>
 </file>
 
-<file path=ppt/slides/slide17.xml><?xml version="1.0" encoding="utf-8"?>
+<file path=ppt/slides/slide18.xml><?xml version="1.0" encoding="utf-8"?>
 <p:sld xmlns:a="http://schemas.openxmlformats.org/drawingml/2006/main" xmlns:r="http://schemas.openxmlformats.org/officeDocument/2006/relationships" xmlns:p="http://schemas.openxmlformats.org/presentationml/2006/main">
   <p:cSld>
     <p:bg>
@@ -9662,186 +9754,6 @@
 </p:sld>
 </file>
 
-<file path=ppt/slides/slide18.xml><?xml version="1.0" encoding="utf-8"?>
-<p:sld xmlns:a="http://schemas.openxmlformats.org/drawingml/2006/main" xmlns:r="http://schemas.openxmlformats.org/officeDocument/2006/relationships" xmlns:p="http://schemas.openxmlformats.org/presentationml/2006/main">
-  <p:cSld>
-    <p:spTree>
-      <p:nvGrpSpPr>
-        <p:cNvPr id="1" name=""/>
-        <p:cNvGrpSpPr/>
-        <p:nvPr/>
-      </p:nvGrpSpPr>
-      <p:grpSpPr>
-        <a:xfrm>
-          <a:off x="0" y="0"/>
-          <a:ext cx="0" cy="0"/>
-          <a:chOff x="0" y="0"/>
-          <a:chExt cx="0" cy="0"/>
-        </a:xfrm>
-      </p:grpSpPr>
-      <p:sp>
-        <p:nvSpPr>
-          <p:cNvPr id="2" name="Title 1">
-            <a:extLst>
-              <a:ext uri="{FF2B5EF4-FFF2-40B4-BE49-F238E27FC236}">
-                <a16:creationId xmlns:a16="http://schemas.microsoft.com/office/drawing/2014/main" id="{6FA608A1-7D49-AD71-83F0-33A9CF74BAD7}"/>
-              </a:ext>
-            </a:extLst>
-          </p:cNvPr>
-          <p:cNvSpPr>
-            <a:spLocks noGrp="1"/>
-          </p:cNvSpPr>
-          <p:nvPr>
-            <p:ph type="title"/>
-          </p:nvPr>
-        </p:nvSpPr>
-        <p:spPr/>
-        <p:txBody>
-          <a:bodyPr/>
-          <a:lstStyle/>
-          <a:p>
-            <a:r>
-              <a:rPr lang="en-US" dirty="0"/>
-              <a:t>Labs</a:t>
-            </a:r>
-          </a:p>
-        </p:txBody>
-      </p:sp>
-      <p:sp>
-        <p:nvSpPr>
-          <p:cNvPr id="3" name="Content Placeholder 2">
-            <a:extLst>
-              <a:ext uri="{FF2B5EF4-FFF2-40B4-BE49-F238E27FC236}">
-                <a16:creationId xmlns:a16="http://schemas.microsoft.com/office/drawing/2014/main" id="{FD7D5F8A-DD3A-959F-90B5-E87FD1DDA2D5}"/>
-              </a:ext>
-            </a:extLst>
-          </p:cNvPr>
-          <p:cNvSpPr>
-            <a:spLocks noGrp="1"/>
-          </p:cNvSpPr>
-          <p:nvPr>
-            <p:ph idx="1"/>
-          </p:nvPr>
-        </p:nvSpPr>
-        <p:spPr>
-          <a:xfrm>
-            <a:off x="2231136" y="2638044"/>
-            <a:ext cx="7729728" cy="3688111"/>
-          </a:xfrm>
-        </p:spPr>
-        <p:txBody>
-          <a:bodyPr>
-            <a:normAutofit fontScale="85000" lnSpcReduction="20000"/>
-          </a:bodyPr>
-          <a:lstStyle/>
-          <a:p>
-            <a:r>
-              <a:rPr lang="en-US" dirty="0"/>
-              <a:t>Mandatory Attendance starting the week of September 14, 2026</a:t>
-            </a:r>
-          </a:p>
-          <a:p>
-            <a:r>
-              <a:rPr lang="en-US" dirty="0"/>
-              <a:t>Google </a:t>
-            </a:r>
-            <a:r>
-              <a:rPr lang="en-US" dirty="0" err="1"/>
-              <a:t>Colab</a:t>
-            </a:r>
-            <a:r>
-              <a:rPr lang="en-US" dirty="0"/>
-              <a:t> notebook – workbook style</a:t>
-            </a:r>
-          </a:p>
-          <a:p>
-            <a:pPr lvl="1"/>
-            <a:r>
-              <a:rPr lang="en-US" dirty="0"/>
-              <a:t>Bottom up learning of coding practices</a:t>
-            </a:r>
-          </a:p>
-          <a:p>
-            <a:pPr lvl="1"/>
-            <a:r>
-              <a:rPr lang="en-US" dirty="0"/>
-              <a:t>Answer questions together with a partner</a:t>
-            </a:r>
-          </a:p>
-          <a:p>
-            <a:pPr lvl="1"/>
-            <a:r>
-              <a:rPr lang="en-US" dirty="0"/>
-              <a:t>Pair coding to develop skills and help each other out</a:t>
-            </a:r>
-          </a:p>
-          <a:p>
-            <a:pPr lvl="1"/>
-            <a:r>
-              <a:rPr lang="en-US" dirty="0"/>
-              <a:t>Practice our skills in a safe environment that has low risk</a:t>
-            </a:r>
-          </a:p>
-          <a:p>
-            <a:r>
-              <a:rPr lang="en-US" dirty="0"/>
-              <a:t>Labs are worth 12% of total grade</a:t>
-            </a:r>
-          </a:p>
-          <a:p>
-            <a:pPr lvl="1"/>
-            <a:r>
-              <a:rPr lang="en-US" dirty="0"/>
-              <a:t>8-9 Labs starting in Week 2</a:t>
-            </a:r>
-          </a:p>
-          <a:p>
-            <a:pPr lvl="1"/>
-            <a:r>
-              <a:rPr lang="en-US" dirty="0"/>
-              <a:t>Attend and participate in the lab = 2 point</a:t>
-            </a:r>
-          </a:p>
-          <a:p>
-            <a:pPr lvl="1"/>
-            <a:r>
-              <a:rPr lang="en-US" dirty="0"/>
-              <a:t>Lab grade is out of 12 </a:t>
-            </a:r>
-          </a:p>
-          <a:p>
-            <a:pPr lvl="1"/>
-            <a:r>
-              <a:rPr lang="en-US" dirty="0"/>
-              <a:t>Grading is based on participation</a:t>
-            </a:r>
-          </a:p>
-          <a:p>
-            <a:pPr lvl="1"/>
-            <a:r>
-              <a:rPr lang="en-US" dirty="0"/>
-              <a:t>Attend and participate in 6 labs = earn 12/12 = 12% of final grade</a:t>
-            </a:r>
-          </a:p>
-          <a:p>
-            <a:pPr lvl="1"/>
-            <a:endParaRPr lang="en-US" dirty="0"/>
-          </a:p>
-        </p:txBody>
-      </p:sp>
-    </p:spTree>
-    <p:extLst>
-      <p:ext uri="{BB962C8B-B14F-4D97-AF65-F5344CB8AC3E}">
-        <p14:creationId xmlns:p14="http://schemas.microsoft.com/office/powerpoint/2010/main" val="1199974937"/>
-      </p:ext>
-    </p:extLst>
-  </p:cSld>
-  <p:clrMapOvr>
-    <a:masterClrMapping/>
-  </p:clrMapOvr>
-</p:sld>
-</file>
-
 <file path=ppt/slides/slide19.xml><?xml version="1.0" encoding="utf-8"?>
 <p:sld xmlns:a="http://schemas.openxmlformats.org/drawingml/2006/main" xmlns:r="http://schemas.openxmlformats.org/officeDocument/2006/relationships" xmlns:p="http://schemas.openxmlformats.org/presentationml/2006/main">
   <p:cSld>
@@ -9864,7 +9776,7 @@
           <p:cNvPr id="2" name="Title 1">
             <a:extLst>
               <a:ext uri="{FF2B5EF4-FFF2-40B4-BE49-F238E27FC236}">
-                <a16:creationId xmlns:a16="http://schemas.microsoft.com/office/drawing/2014/main" id="{EED23A7D-E92A-3FB7-68FF-EFA92EF5A78C}"/>
+                <a16:creationId xmlns:a16="http://schemas.microsoft.com/office/drawing/2014/main" id="{6FA608A1-7D49-AD71-83F0-33A9CF74BAD7}"/>
               </a:ext>
             </a:extLst>
           </p:cNvPr>
@@ -9882,7 +9794,7 @@
           <a:p>
             <a:r>
               <a:rPr lang="en-US" dirty="0"/>
-              <a:t>Homework</a:t>
+              <a:t>Labs</a:t>
             </a:r>
           </a:p>
         </p:txBody>
@@ -9892,7 +9804,7 @@
           <p:cNvPr id="3" name="Content Placeholder 2">
             <a:extLst>
               <a:ext uri="{FF2B5EF4-FFF2-40B4-BE49-F238E27FC236}">
-                <a16:creationId xmlns:a16="http://schemas.microsoft.com/office/drawing/2014/main" id="{F7AB469B-3607-8B18-0F17-07550545EF02}"/>
+                <a16:creationId xmlns:a16="http://schemas.microsoft.com/office/drawing/2014/main" id="{FD7D5F8A-DD3A-959F-90B5-E87FD1DDA2D5}"/>
               </a:ext>
             </a:extLst>
           </p:cNvPr>
@@ -9903,22 +9815,27 @@
             <p:ph idx="1"/>
           </p:nvPr>
         </p:nvSpPr>
-        <p:spPr/>
+        <p:spPr>
+          <a:xfrm>
+            <a:off x="2231136" y="2638044"/>
+            <a:ext cx="7729728" cy="3688111"/>
+          </a:xfrm>
+        </p:spPr>
         <p:txBody>
           <a:bodyPr>
-            <a:normAutofit fontScale="92500" lnSpcReduction="20000"/>
+            <a:normAutofit fontScale="85000" lnSpcReduction="20000"/>
           </a:bodyPr>
           <a:lstStyle/>
           <a:p>
             <a:r>
               <a:rPr lang="en-US" dirty="0"/>
-              <a:t>Many weeks there will be a homework assignment that is intended to be independent work</a:t>
-            </a:r>
-          </a:p>
-          <a:p>
-            <a:r>
-              <a:rPr lang="en-US" dirty="0"/>
-              <a:t>Completed through Google </a:t>
+              <a:t>Mandatory Attendance starting the week of September 14, 2026</a:t>
+            </a:r>
+          </a:p>
+          <a:p>
+            <a:r>
+              <a:rPr lang="en-US" dirty="0"/>
+              <a:t>Google </a:t>
             </a:r>
             <a:r>
               <a:rPr lang="en-US" dirty="0" err="1"/>
@@ -9926,46 +9843,88 @@
             </a:r>
             <a:r>
               <a:rPr lang="en-US" dirty="0"/>
-              <a:t> </a:t>
-            </a:r>
-          </a:p>
-          <a:p>
-            <a:r>
-              <a:rPr lang="en-US" dirty="0"/>
-              <a:t>Submitted on Moodle</a:t>
+              <a:t> notebook – workbook style</a:t>
             </a:r>
           </a:p>
           <a:p>
             <a:pPr lvl="1"/>
             <a:r>
               <a:rPr lang="en-US" dirty="0"/>
-              <a:t>Save your completed notebook to drive and then upload to Moodle</a:t>
-            </a:r>
-          </a:p>
-          <a:p>
-            <a:r>
-              <a:rPr lang="en-US" dirty="0"/>
-              <a:t>Due before Friday of the next week before 5pm</a:t>
-            </a:r>
-          </a:p>
-          <a:p>
-            <a:r>
-              <a:rPr lang="en-US" dirty="0"/>
-              <a:t>These assignments help you integrate the top-down knowledge you are gaining in lecture with the bottom-up skills you gain in your lab and personal practice.</a:t>
-            </a:r>
-          </a:p>
-          <a:p>
-            <a:r>
-              <a:rPr lang="en-US" dirty="0"/>
-              <a:t>A first homework will be released this week to help you get used to the way we do these assignments and help you through any issues.</a:t>
-            </a:r>
+              <a:t>Bottom up learning of coding practices</a:t>
+            </a:r>
+          </a:p>
+          <a:p>
+            <a:pPr lvl="1"/>
+            <a:r>
+              <a:rPr lang="en-US" dirty="0"/>
+              <a:t>Answer questions together with a partner</a:t>
+            </a:r>
+          </a:p>
+          <a:p>
+            <a:pPr lvl="1"/>
+            <a:r>
+              <a:rPr lang="en-US" dirty="0"/>
+              <a:t>Pair coding to develop skills and help each other out</a:t>
+            </a:r>
+          </a:p>
+          <a:p>
+            <a:pPr lvl="1"/>
+            <a:r>
+              <a:rPr lang="en-US" dirty="0"/>
+              <a:t>Practice our skills in a safe environment that has low risk</a:t>
+            </a:r>
+          </a:p>
+          <a:p>
+            <a:r>
+              <a:rPr lang="en-US" dirty="0"/>
+              <a:t>Labs are worth 12% of total grade</a:t>
+            </a:r>
+          </a:p>
+          <a:p>
+            <a:pPr lvl="1"/>
+            <a:r>
+              <a:rPr lang="en-US" dirty="0"/>
+              <a:t>8-9 Labs starting in Week 2</a:t>
+            </a:r>
+          </a:p>
+          <a:p>
+            <a:pPr lvl="1"/>
+            <a:r>
+              <a:rPr lang="en-US" dirty="0"/>
+              <a:t>Attend and participate in the lab = 2 point</a:t>
+            </a:r>
+          </a:p>
+          <a:p>
+            <a:pPr lvl="1"/>
+            <a:r>
+              <a:rPr lang="en-US" dirty="0"/>
+              <a:t>Lab grade is out of 12 </a:t>
+            </a:r>
+          </a:p>
+          <a:p>
+            <a:pPr lvl="1"/>
+            <a:r>
+              <a:rPr lang="en-US" dirty="0"/>
+              <a:t>Grading is based on participation</a:t>
+            </a:r>
+          </a:p>
+          <a:p>
+            <a:pPr lvl="1"/>
+            <a:r>
+              <a:rPr lang="en-US" dirty="0"/>
+              <a:t>Attend and participate in 6 labs = earn 12/12 = 12% of final grade</a:t>
+            </a:r>
+          </a:p>
+          <a:p>
+            <a:pPr lvl="1"/>
+            <a:endParaRPr lang="en-US" dirty="0"/>
           </a:p>
         </p:txBody>
       </p:sp>
     </p:spTree>
     <p:extLst>
       <p:ext uri="{BB962C8B-B14F-4D97-AF65-F5344CB8AC3E}">
-        <p14:creationId xmlns:p14="http://schemas.microsoft.com/office/powerpoint/2010/main" val="3254469506"/>
+        <p14:creationId xmlns:p14="http://schemas.microsoft.com/office/powerpoint/2010/main" val="1199974937"/>
       </p:ext>
     </p:extLst>
   </p:cSld>
@@ -10055,121 +10014,129 @@
         </p:spPr>
         <p:txBody>
           <a:bodyPr>
-            <a:normAutofit fontScale="85000" lnSpcReduction="20000"/>
+            <a:normAutofit fontScale="77500" lnSpcReduction="20000"/>
           </a:bodyPr>
           <a:lstStyle/>
           <a:p>
             <a:r>
-              <a:rPr lang="en-CA" b="1" dirty="0"/>
+              <a:rPr lang="en-US" dirty="0"/>
               <a:t>Technical setup</a:t>
             </a:r>
+          </a:p>
+          <a:p>
+            <a:pPr marL="0" indent="0">
+              <a:buNone/>
+            </a:pPr>
+            <a:r>
+              <a:rPr lang="en-US" dirty="0"/>
+              <a:t>- Have the syllabus, grading table, and academic-integrity regulation link ready to display.</a:t>
+            </a:r>
+          </a:p>
+          <a:p>
+            <a:pPr marL="0" indent="0">
+              <a:buNone/>
+            </a:pPr>
+            <a:r>
+              <a:rPr lang="en-US" dirty="0"/>
+              <a:t>- Bring an internet-capable device and confirm the room projector shows external links.</a:t>
+            </a:r>
+          </a:p>
+          <a:p>
+            <a:r>
+              <a:rPr lang="en-US" dirty="0"/>
+              <a:t>Content to review</a:t>
+            </a:r>
+          </a:p>
+          <a:p>
+            <a:pPr marL="0" indent="0">
+              <a:buNone/>
+            </a:pPr>
+            <a:r>
+              <a:rPr lang="en-US" dirty="0"/>
+              <a:t>- Skim the "pass the tests" worked examples so you can answer grade-scenario questions confidently.</a:t>
+            </a:r>
+          </a:p>
+          <a:p>
+            <a:pPr marL="0" indent="0">
+              <a:buNone/>
+            </a:pPr>
+            <a:r>
+              <a:rPr lang="en-US" dirty="0"/>
+              <a:t>- Refresh the two "Is this Computer Science?" examples (gaming, 3D animation) and be ready to prompt discussion.</a:t>
+            </a:r>
+          </a:p>
+          <a:p>
+            <a:r>
+              <a:rPr lang="en-US" dirty="0"/>
+              <a:t>Classroom flow</a:t>
+            </a:r>
+          </a:p>
+          <a:p>
+            <a:pPr marL="0" indent="0">
+              <a:buNone/>
+            </a:pPr>
+            <a:r>
+              <a:rPr lang="en-US" dirty="0"/>
+              <a:t>- Plan the ~3-minute "Is this CS?" group brainstorm (groups of 3–5) and leave time to share out.</a:t>
+            </a:r>
+          </a:p>
+          <a:p>
+            <a:pPr marL="0" indent="0">
+              <a:buNone/>
+            </a:pPr>
+            <a:r>
+              <a:rPr lang="en-US" dirty="0"/>
+              <a:t>- Reserve ~2 minutes for the first participation check so students practice the routine early.</a:t>
+            </a:r>
+          </a:p>
+          <a:p>
+            <a:r>
+              <a:rPr lang="en-US" dirty="0"/>
+              <a:t>Gotchas to anticipate</a:t>
+            </a:r>
+          </a:p>
+          <a:p>
+            <a:pPr marL="0" indent="0">
+              <a:buNone/>
+            </a:pPr>
+            <a:r>
+              <a:rPr lang="en-US" dirty="0"/>
+              <a:t>- Students fixate on the "pass the tests" rule — have the FAQ examples ready to defuse anxiety.</a:t>
+            </a:r>
+          </a:p>
+          <a:p>
+            <a:pPr marL="0" indent="0">
+              <a:buNone/>
+            </a:pPr>
+            <a:r>
+              <a:rPr lang="en-US" dirty="0"/>
+              <a:t>- Set expectations now that photographing code off the board correlates with lower success; emphasize the process.</a:t>
+            </a:r>
+          </a:p>
+          <a:p>
+            <a:pPr marL="0" indent="0">
+              <a:buNone/>
+            </a:pPr>
+            <a:r>
+              <a:rPr lang="en-US" dirty="0"/>
+              <a:t>- Clarify the appropriate-vs-inappropriate GenAI boundary early; it recurs in Lecture 2.</a:t>
+            </a:r>
+          </a:p>
+          <a:p>
+            <a:r>
+              <a:rPr lang="en-US" dirty="0"/>
+              <a:t>Notebook ↔ slides</a:t>
+            </a:r>
+          </a:p>
+          <a:p>
+            <a:pPr marL="0" indent="0">
+              <a:buNone/>
+            </a:pPr>
+            <a:r>
+              <a:rPr lang="en-US" dirty="0"/>
+              <a:t>- No example notebook for this lecture (intro/admin only)</a:t>
+            </a:r>
             <a:endParaRPr lang="en-CA" dirty="0"/>
-          </a:p>
-          <a:p>
-            <a:pPr lvl="1"/>
-            <a:r>
-              <a:rPr lang="en-CA" dirty="0"/>
-              <a:t>Have the syllabus, grading table, and academic-integrity regulation link ready to display.</a:t>
-            </a:r>
-          </a:p>
-          <a:p>
-            <a:pPr lvl="1"/>
-            <a:r>
-              <a:rPr lang="en-CA" dirty="0"/>
-              <a:t>Bring an internet-capable device and confirm the room projector shows external links.</a:t>
-            </a:r>
-          </a:p>
-          <a:p>
-            <a:r>
-              <a:rPr lang="en-CA" b="1" dirty="0"/>
-              <a:t>Content to review</a:t>
-            </a:r>
-            <a:endParaRPr lang="en-CA" dirty="0"/>
-          </a:p>
-          <a:p>
-            <a:pPr lvl="1"/>
-            <a:r>
-              <a:rPr lang="en-CA" dirty="0"/>
-              <a:t>Skim the "pass the tests" worked examples so you can answer grade-scenario questions confidently.</a:t>
-            </a:r>
-          </a:p>
-          <a:p>
-            <a:pPr lvl="1"/>
-            <a:r>
-              <a:rPr lang="en-CA" dirty="0"/>
-              <a:t>Refresh the two "Is this Computer Science?" examples (gaming, 3D animation) and be ready to prompt discussion.</a:t>
-            </a:r>
-          </a:p>
-          <a:p>
-            <a:r>
-              <a:rPr lang="en-CA" b="1" dirty="0"/>
-              <a:t>Classroom flow</a:t>
-            </a:r>
-            <a:endParaRPr lang="en-CA" dirty="0"/>
-          </a:p>
-          <a:p>
-            <a:pPr lvl="1"/>
-            <a:r>
-              <a:rPr lang="en-CA" dirty="0"/>
-              <a:t>Plan the ~3-minute "Is this CS?" group brainstorm (groups of 3–5) and leave time to share out.</a:t>
-            </a:r>
-          </a:p>
-          <a:p>
-            <a:pPr lvl="1"/>
-            <a:r>
-              <a:rPr lang="en-CA" dirty="0"/>
-              <a:t>Reserve ~2 minutes for the first participation check so students practice the routine early.</a:t>
-            </a:r>
-          </a:p>
-          <a:p>
-            <a:r>
-              <a:rPr lang="en-CA" b="1" dirty="0"/>
-              <a:t>Gotchas to anticipate</a:t>
-            </a:r>
-            <a:endParaRPr lang="en-CA" dirty="0"/>
-          </a:p>
-          <a:p>
-            <a:pPr lvl="1"/>
-            <a:r>
-              <a:rPr lang="en-CA" dirty="0"/>
-              <a:t>Students fixate on the "pass the tests" rule — have the FAQ examples ready to defuse anxiety.</a:t>
-            </a:r>
-          </a:p>
-          <a:p>
-            <a:pPr lvl="1"/>
-            <a:r>
-              <a:rPr lang="en-CA" dirty="0"/>
-              <a:t>Set expectations now that photographing code off the board correlates with lower success; emphasize the </a:t>
-            </a:r>
-            <a:r>
-              <a:rPr lang="en-CA" i="1" dirty="0"/>
-              <a:t>process</a:t>
-            </a:r>
-            <a:r>
-              <a:rPr lang="en-CA" dirty="0"/>
-              <a:t>.</a:t>
-            </a:r>
-          </a:p>
-          <a:p>
-            <a:pPr lvl="1"/>
-            <a:r>
-              <a:rPr lang="en-CA" dirty="0"/>
-              <a:t>Clarify the appropriate-vs-inappropriate GenAI boundary early; it recurs in Lecture 2.</a:t>
-            </a:r>
-          </a:p>
-          <a:p>
-            <a:r>
-              <a:rPr lang="en-CA" b="1" dirty="0"/>
-              <a:t>Notebook ↔ slides</a:t>
-            </a:r>
-            <a:endParaRPr lang="en-CA" dirty="0"/>
-          </a:p>
-          <a:p>
-            <a:pPr lvl="1"/>
-            <a:r>
-              <a:rPr lang="en-CA" dirty="0"/>
-              <a:t>No example notebook for this lecture (intro/admin only) — nothing to reconcile.</a:t>
-            </a:r>
           </a:p>
         </p:txBody>
       </p:sp>
@@ -10208,7 +10175,7 @@
           <p:cNvPr id="2" name="Title 1">
             <a:extLst>
               <a:ext uri="{FF2B5EF4-FFF2-40B4-BE49-F238E27FC236}">
-                <a16:creationId xmlns:a16="http://schemas.microsoft.com/office/drawing/2014/main" id="{8118A232-EE02-AD51-FC45-40209A9689FF}"/>
+                <a16:creationId xmlns:a16="http://schemas.microsoft.com/office/drawing/2014/main" id="{EED23A7D-E92A-3FB7-68FF-EFA92EF5A78C}"/>
               </a:ext>
             </a:extLst>
           </p:cNvPr>
@@ -10226,7 +10193,7 @@
           <a:p>
             <a:r>
               <a:rPr lang="en-US" dirty="0"/>
-              <a:t>Environment</a:t>
+              <a:t>Homework</a:t>
             </a:r>
           </a:p>
         </p:txBody>
@@ -10236,7 +10203,7 @@
           <p:cNvPr id="3" name="Content Placeholder 2">
             <a:extLst>
               <a:ext uri="{FF2B5EF4-FFF2-40B4-BE49-F238E27FC236}">
-                <a16:creationId xmlns:a16="http://schemas.microsoft.com/office/drawing/2014/main" id="{8CA2D9C7-3DF5-AF96-6EF4-B9E04A803ABD}"/>
+                <a16:creationId xmlns:a16="http://schemas.microsoft.com/office/drawing/2014/main" id="{F7AB469B-3607-8B18-0F17-07550545EF02}"/>
               </a:ext>
             </a:extLst>
           </p:cNvPr>
@@ -10247,30 +10214,22 @@
             <p:ph idx="1"/>
           </p:nvPr>
         </p:nvSpPr>
-        <p:spPr>
-          <a:xfrm>
-            <a:off x="2231136" y="2638044"/>
-            <a:ext cx="4588117" cy="3101983"/>
-          </a:xfrm>
-        </p:spPr>
+        <p:spPr/>
         <p:txBody>
           <a:bodyPr>
-            <a:normAutofit fontScale="92500" lnSpcReduction="10000"/>
+            <a:normAutofit fontScale="92500" lnSpcReduction="20000"/>
           </a:bodyPr>
           <a:lstStyle/>
           <a:p>
-            <a:pPr marL="0" indent="0">
-              <a:buNone/>
-            </a:pPr>
-            <a:r>
-              <a:rPr lang="en-US" u="sng" dirty="0"/>
-              <a:t>Programming Tools</a:t>
-            </a:r>
-          </a:p>
-          <a:p>
-            <a:r>
-              <a:rPr lang="en-US" dirty="0"/>
-              <a:t>Google </a:t>
+            <a:r>
+              <a:rPr lang="en-US" dirty="0"/>
+              <a:t>Many weeks there will be a homework assignment that is intended to be independent work</a:t>
+            </a:r>
+          </a:p>
+          <a:p>
+            <a:r>
+              <a:rPr lang="en-US" dirty="0"/>
+              <a:t>Completed through Google </a:t>
             </a:r>
             <a:r>
               <a:rPr lang="en-US" dirty="0" err="1"/>
@@ -10278,133 +10237,46 @@
             </a:r>
             <a:r>
               <a:rPr lang="en-US" dirty="0"/>
-              <a:t> / </a:t>
-            </a:r>
-            <a:r>
-              <a:rPr lang="en-US" dirty="0" err="1"/>
-              <a:t>Jupyter</a:t>
-            </a:r>
-            <a:r>
-              <a:rPr lang="en-US" dirty="0"/>
-              <a:t> Notebook</a:t>
+              <a:t> </a:t>
+            </a:r>
+          </a:p>
+          <a:p>
+            <a:r>
+              <a:rPr lang="en-US" dirty="0"/>
+              <a:t>Submitted on Moodle</a:t>
             </a:r>
           </a:p>
           <a:p>
             <a:pPr lvl="1"/>
             <a:r>
               <a:rPr lang="en-US" dirty="0"/>
-              <a:t>Browser based coding environment</a:t>
-            </a:r>
-          </a:p>
-          <a:p>
-            <a:r>
-              <a:rPr lang="en-US" dirty="0"/>
-              <a:t>Python 3</a:t>
-            </a:r>
-          </a:p>
-          <a:p>
-            <a:r>
-              <a:rPr lang="en-US" dirty="0"/>
-              <a:t>Google Drive</a:t>
-            </a:r>
-          </a:p>
-          <a:p>
-            <a:r>
-              <a:rPr lang="en-US" dirty="0"/>
-              <a:t>Moodle</a:t>
-            </a:r>
-          </a:p>
-          <a:p>
-            <a:r>
-              <a:rPr lang="en-US" dirty="0"/>
-              <a:t>Please bring an internet capable device to class</a:t>
-            </a:r>
-          </a:p>
-          <a:p>
-            <a:r>
-              <a:rPr lang="en-US" dirty="0"/>
-              <a:t>No installs or special computer equipment required</a:t>
-            </a:r>
-          </a:p>
-          <a:p>
-            <a:endParaRPr lang="en-US" dirty="0"/>
-          </a:p>
-          <a:p>
-            <a:endParaRPr lang="en-US" dirty="0"/>
-          </a:p>
-        </p:txBody>
-      </p:sp>
-      <p:sp>
-        <p:nvSpPr>
-          <p:cNvPr id="4" name="TextBox 3">
-            <a:extLst>
-              <a:ext uri="{FF2B5EF4-FFF2-40B4-BE49-F238E27FC236}">
-                <a16:creationId xmlns:a16="http://schemas.microsoft.com/office/drawing/2014/main" id="{554063F2-FF0F-C635-8B1A-4D43EDBC2D26}"/>
-              </a:ext>
-            </a:extLst>
-          </p:cNvPr>
-          <p:cNvSpPr txBox="1"/>
-          <p:nvPr/>
-        </p:nvSpPr>
-        <p:spPr>
-          <a:xfrm>
-            <a:off x="6819253" y="2625878"/>
-            <a:ext cx="5005953" cy="2031325"/>
-          </a:xfrm>
-          <a:prstGeom prst="rect">
-            <a:avLst/>
-          </a:prstGeom>
-          <a:noFill/>
-        </p:spPr>
-        <p:txBody>
-          <a:bodyPr wrap="square" rtlCol="0">
-            <a:spAutoFit/>
-          </a:bodyPr>
-          <a:lstStyle/>
-          <a:p>
-            <a:r>
-              <a:rPr lang="en-US" u="sng" dirty="0"/>
-              <a:t>Textbook</a:t>
-            </a:r>
-          </a:p>
-          <a:p>
-            <a:endParaRPr lang="en-US" u="sng" dirty="0"/>
-          </a:p>
-          <a:p>
-            <a:r>
-              <a:rPr lang="en-CA" dirty="0"/>
-              <a:t>CS1910 — Computer Science 1 2nd Edition</a:t>
-            </a:r>
-          </a:p>
-          <a:p>
-            <a:pPr marL="285750" indent="-285750">
-              <a:buFont typeface="Arial" panose="020B0604020202020204" pitchFamily="34" charset="0"/>
-              <a:buChar char="•"/>
-            </a:pPr>
-            <a:r>
-              <a:rPr lang="en-CA" dirty="0"/>
-              <a:t>Course topics roughly align with the textbook</a:t>
-            </a:r>
-          </a:p>
-          <a:p>
-            <a:pPr marL="285750" indent="-285750">
-              <a:buFont typeface="Arial" panose="020B0604020202020204" pitchFamily="34" charset="0"/>
-              <a:buChar char="•"/>
-            </a:pPr>
-            <a:r>
-              <a:rPr lang="en-CA" dirty="0"/>
-              <a:t>Course has evolved since the book was written and so we will not go entirely in the same order</a:t>
-            </a:r>
-          </a:p>
-          <a:p>
-            <a:endParaRPr lang="en-US" u="sng" dirty="0"/>
+              <a:t>Save your completed notebook to drive and then upload to Moodle</a:t>
+            </a:r>
+          </a:p>
+          <a:p>
+            <a:r>
+              <a:rPr lang="en-US" dirty="0"/>
+              <a:t>Due before Friday of the next week before 5pm</a:t>
+            </a:r>
+          </a:p>
+          <a:p>
+            <a:r>
+              <a:rPr lang="en-US" dirty="0"/>
+              <a:t>These assignments help you integrate the top-down knowledge you are gaining in lecture with the bottom-up skills you gain in your lab and personal practice.</a:t>
+            </a:r>
+          </a:p>
+          <a:p>
+            <a:r>
+              <a:rPr lang="en-US" dirty="0"/>
+              <a:t>A first homework will be released this week to help you get used to the way we do these assignments and help you through any issues.</a:t>
+            </a:r>
           </a:p>
         </p:txBody>
       </p:sp>
     </p:spTree>
     <p:extLst>
       <p:ext uri="{BB962C8B-B14F-4D97-AF65-F5344CB8AC3E}">
-        <p14:creationId xmlns:p14="http://schemas.microsoft.com/office/powerpoint/2010/main" val="1594077462"/>
+        <p14:creationId xmlns:p14="http://schemas.microsoft.com/office/powerpoint/2010/main" val="3254469506"/>
       </p:ext>
     </p:extLst>
   </p:cSld>
@@ -10436,7 +10308,7 @@
           <p:cNvPr id="2" name="Title 1">
             <a:extLst>
               <a:ext uri="{FF2B5EF4-FFF2-40B4-BE49-F238E27FC236}">
-                <a16:creationId xmlns:a16="http://schemas.microsoft.com/office/drawing/2014/main" id="{A815C537-3713-A173-CE64-94A62B3D6804}"/>
+                <a16:creationId xmlns:a16="http://schemas.microsoft.com/office/drawing/2014/main" id="{8118A232-EE02-AD51-FC45-40209A9689FF}"/>
               </a:ext>
             </a:extLst>
           </p:cNvPr>
@@ -10454,7 +10326,7 @@
           <a:p>
             <a:r>
               <a:rPr lang="en-US" dirty="0"/>
-              <a:t>Moodle</a:t>
+              <a:t>Environment</a:t>
             </a:r>
           </a:p>
         </p:txBody>
@@ -10464,7 +10336,7 @@
           <p:cNvPr id="3" name="Content Placeholder 2">
             <a:extLst>
               <a:ext uri="{FF2B5EF4-FFF2-40B4-BE49-F238E27FC236}">
-                <a16:creationId xmlns:a16="http://schemas.microsoft.com/office/drawing/2014/main" id="{A2429A4E-80C5-D5E1-AA71-D46F59AA320A}"/>
+                <a16:creationId xmlns:a16="http://schemas.microsoft.com/office/drawing/2014/main" id="{8CA2D9C7-3DF5-AF96-6EF4-B9E04A803ABD}"/>
               </a:ext>
             </a:extLst>
           </p:cNvPr>
@@ -10475,39 +10347,90 @@
             <p:ph idx="1"/>
           </p:nvPr>
         </p:nvSpPr>
-        <p:spPr/>
-        <p:txBody>
-          <a:bodyPr/>
+        <p:spPr>
+          <a:xfrm>
+            <a:off x="2231136" y="2638044"/>
+            <a:ext cx="4588117" cy="3101983"/>
+          </a:xfrm>
+        </p:spPr>
+        <p:txBody>
+          <a:bodyPr>
+            <a:normAutofit fontScale="92500" lnSpcReduction="10000"/>
+          </a:bodyPr>
           <a:lstStyle/>
           <a:p>
-            <a:r>
-              <a:rPr lang="en-US" dirty="0"/>
-              <a:t>Course Notes Posted to Moodle</a:t>
-            </a:r>
-          </a:p>
-          <a:p>
-            <a:r>
-              <a:rPr lang="en-US" dirty="0"/>
-              <a:t>Announcements made via Moodle</a:t>
-            </a:r>
-          </a:p>
-          <a:p>
-            <a:r>
-              <a:rPr lang="en-US" dirty="0"/>
-              <a:t>Homework submitted via Moodle</a:t>
-            </a:r>
-          </a:p>
-          <a:p>
-            <a:r>
-              <a:rPr lang="en-US" dirty="0"/>
-              <a:t>Class participation facilitated via Moodle</a:t>
-            </a:r>
-          </a:p>
-          <a:p>
-            <a:r>
-              <a:rPr lang="en-US" dirty="0"/>
-              <a:t>Grades posted to Moodle</a:t>
-            </a:r>
+            <a:pPr marL="0" indent="0">
+              <a:buNone/>
+            </a:pPr>
+            <a:r>
+              <a:rPr lang="en-US" u="sng" dirty="0"/>
+              <a:t>Programming Tools</a:t>
+            </a:r>
+          </a:p>
+          <a:p>
+            <a:r>
+              <a:rPr lang="en-US" dirty="0"/>
+              <a:t>Google </a:t>
+            </a:r>
+            <a:r>
+              <a:rPr lang="en-US" dirty="0" err="1"/>
+              <a:t>Colab</a:t>
+            </a:r>
+            <a:r>
+              <a:rPr lang="en-US" dirty="0"/>
+              <a:t> / </a:t>
+            </a:r>
+            <a:r>
+              <a:rPr lang="en-US" dirty="0" err="1"/>
+              <a:t>Jupyter</a:t>
+            </a:r>
+            <a:r>
+              <a:rPr lang="en-US" dirty="0"/>
+              <a:t> Notebook</a:t>
+            </a:r>
+          </a:p>
+          <a:p>
+            <a:pPr lvl="1"/>
+            <a:r>
+              <a:rPr lang="en-US" dirty="0"/>
+              <a:t>Browser based coding environment</a:t>
+            </a:r>
+          </a:p>
+          <a:p>
+            <a:r>
+              <a:rPr lang="en-US" dirty="0"/>
+              <a:t>Python 3</a:t>
+            </a:r>
+          </a:p>
+          <a:p>
+            <a:r>
+              <a:rPr lang="en-US" dirty="0"/>
+              <a:t>Google Drive</a:t>
+            </a:r>
+          </a:p>
+          <a:p>
+            <a:r>
+              <a:rPr lang="en-US" dirty="0"/>
+              <a:t>Moodle</a:t>
+            </a:r>
+          </a:p>
+          <a:p>
+            <a:r>
+              <a:rPr lang="en-US" dirty="0"/>
+              <a:t>Please bring an internet capable device to class</a:t>
+            </a:r>
+          </a:p>
+          <a:p>
+            <a:r>
+              <a:rPr lang="en-US" dirty="0"/>
+              <a:t>No installs or special computer equipment required</a:t>
+            </a:r>
+          </a:p>
+          <a:p>
+            <a:endParaRPr lang="en-US" dirty="0"/>
+          </a:p>
+          <a:p>
+            <a:endParaRPr lang="en-US" dirty="0"/>
           </a:p>
         </p:txBody>
       </p:sp>
@@ -10516,7 +10439,7 @@
           <p:cNvPr id="4" name="TextBox 3">
             <a:extLst>
               <a:ext uri="{FF2B5EF4-FFF2-40B4-BE49-F238E27FC236}">
-                <a16:creationId xmlns:a16="http://schemas.microsoft.com/office/drawing/2014/main" id="{E7CBFD0A-BA31-986B-55F6-5053407B0B94}"/>
+                <a16:creationId xmlns:a16="http://schemas.microsoft.com/office/drawing/2014/main" id="{554063F2-FF0F-C635-8B1A-4D43EDBC2D26}"/>
               </a:ext>
             </a:extLst>
           </p:cNvPr>
@@ -10525,76 +10448,63 @@
         </p:nvSpPr>
         <p:spPr>
           <a:xfrm>
-            <a:off x="2464401" y="4722989"/>
-            <a:ext cx="6968895" cy="369332"/>
+            <a:off x="6819253" y="2625878"/>
+            <a:ext cx="5005953" cy="2031325"/>
           </a:xfrm>
           <a:prstGeom prst="rect">
             <a:avLst/>
           </a:prstGeom>
           <a:noFill/>
-          <a:ln>
-            <a:solidFill>
-              <a:schemeClr val="accent1"/>
-            </a:solidFill>
-          </a:ln>
         </p:spPr>
         <p:txBody>
-          <a:bodyPr wrap="none" rtlCol="0">
+          <a:bodyPr wrap="square" rtlCol="0">
             <a:spAutoFit/>
           </a:bodyPr>
           <a:lstStyle/>
           <a:p>
             <a:r>
-              <a:rPr lang="en-US" dirty="0"/>
-              <a:t>Class Participation is currently open at moodle31.upei.ca under CS 1910</a:t>
-            </a:r>
-          </a:p>
-        </p:txBody>
-      </p:sp>
-      <p:sp>
-        <p:nvSpPr>
-          <p:cNvPr id="5" name="TextBox 4">
-            <a:extLst>
-              <a:ext uri="{FF2B5EF4-FFF2-40B4-BE49-F238E27FC236}">
-                <a16:creationId xmlns:a16="http://schemas.microsoft.com/office/drawing/2014/main" id="{05F1B796-D673-9F46-716A-2DE67742298E}"/>
-              </a:ext>
-            </a:extLst>
-          </p:cNvPr>
-          <p:cNvSpPr txBox="1"/>
-          <p:nvPr/>
-        </p:nvSpPr>
-        <p:spPr>
-          <a:xfrm>
-            <a:off x="2464401" y="5207621"/>
-            <a:ext cx="7650877" cy="369332"/>
-          </a:xfrm>
-          <a:prstGeom prst="rect">
-            <a:avLst/>
-          </a:prstGeom>
-          <a:noFill/>
-          <a:ln>
-            <a:solidFill>
-              <a:schemeClr val="accent1"/>
-            </a:solidFill>
-          </a:ln>
-        </p:spPr>
-        <p:txBody>
-          <a:bodyPr wrap="none" rtlCol="0">
-            <a:spAutoFit/>
-          </a:bodyPr>
-          <a:lstStyle/>
-          <a:p>
-            <a:r>
-              <a:rPr lang="en-US" dirty="0"/>
-              <a:t>2 minute break to participate in today’s class by answering a couple of questions</a:t>
-            </a:r>
+              <a:rPr lang="en-US" u="sng" dirty="0"/>
+              <a:t>Textbook</a:t>
+            </a:r>
+          </a:p>
+          <a:p>
+            <a:endParaRPr lang="en-US" u="sng" dirty="0"/>
+          </a:p>
+          <a:p>
+            <a:r>
+              <a:rPr lang="en-CA" dirty="0"/>
+              <a:t>CS1910 — Computer Science 1 2nd Edition</a:t>
+            </a:r>
+          </a:p>
+          <a:p>
+            <a:pPr marL="285750" indent="-285750">
+              <a:buFont typeface="Arial" panose="020B0604020202020204" pitchFamily="34" charset="0"/>
+              <a:buChar char="•"/>
+            </a:pPr>
+            <a:r>
+              <a:rPr lang="en-CA" dirty="0"/>
+              <a:t>Course topics roughly align with the textbook</a:t>
+            </a:r>
+          </a:p>
+          <a:p>
+            <a:pPr marL="285750" indent="-285750">
+              <a:buFont typeface="Arial" panose="020B0604020202020204" pitchFamily="34" charset="0"/>
+              <a:buChar char="•"/>
+            </a:pPr>
+            <a:r>
+              <a:rPr lang="en-CA" dirty="0"/>
+              <a:t>Course has evolved since the book was written and so we will not go entirely in the same order</a:t>
+            </a:r>
+          </a:p>
+          <a:p>
+            <a:endParaRPr lang="en-US" u="sng" dirty="0"/>
           </a:p>
         </p:txBody>
       </p:sp>
     </p:spTree>
     <p:extLst>
       <p:ext uri="{BB962C8B-B14F-4D97-AF65-F5344CB8AC3E}">
-        <p14:creationId xmlns:p14="http://schemas.microsoft.com/office/powerpoint/2010/main" val="3414665496"/>
+        <p14:creationId xmlns:p14="http://schemas.microsoft.com/office/powerpoint/2010/main" val="1594077462"/>
       </p:ext>
     </p:extLst>
   </p:cSld>
@@ -13184,18 +13094,6 @@
                 </a:solidFill>
               </a:rPr>
               <a:t>Computer Science I</a:t>
-            </a:r>
-          </a:p>
-          <a:p>
-            <a:r>
-              <a:rPr lang="en-US" sz="2400" dirty="0">
-                <a:solidFill>
-                  <a:schemeClr val="tx2">
-                    <a:lumMod val="90000"/>
-                  </a:schemeClr>
-                </a:solidFill>
-              </a:rPr>
-              <a:t>Introduction and Orientation</a:t>
             </a:r>
           </a:p>
         </p:txBody>
@@ -16507,6 +16405,196 @@
           <p:cNvPr id="2" name="Title 1">
             <a:extLst>
               <a:ext uri="{FF2B5EF4-FFF2-40B4-BE49-F238E27FC236}">
+                <a16:creationId xmlns:a16="http://schemas.microsoft.com/office/drawing/2014/main" id="{A815C537-3713-A173-CE64-94A62B3D6804}"/>
+              </a:ext>
+            </a:extLst>
+          </p:cNvPr>
+          <p:cNvSpPr>
+            <a:spLocks noGrp="1"/>
+          </p:cNvSpPr>
+          <p:nvPr>
+            <p:ph type="title"/>
+          </p:nvPr>
+        </p:nvSpPr>
+        <p:spPr/>
+        <p:txBody>
+          <a:bodyPr/>
+          <a:lstStyle/>
+          <a:p>
+            <a:r>
+              <a:rPr lang="en-US" dirty="0"/>
+              <a:t>Moodle</a:t>
+            </a:r>
+          </a:p>
+        </p:txBody>
+      </p:sp>
+      <p:sp>
+        <p:nvSpPr>
+          <p:cNvPr id="3" name="Content Placeholder 2">
+            <a:extLst>
+              <a:ext uri="{FF2B5EF4-FFF2-40B4-BE49-F238E27FC236}">
+                <a16:creationId xmlns:a16="http://schemas.microsoft.com/office/drawing/2014/main" id="{A2429A4E-80C5-D5E1-AA71-D46F59AA320A}"/>
+              </a:ext>
+            </a:extLst>
+          </p:cNvPr>
+          <p:cNvSpPr>
+            <a:spLocks noGrp="1"/>
+          </p:cNvSpPr>
+          <p:nvPr>
+            <p:ph idx="1"/>
+          </p:nvPr>
+        </p:nvSpPr>
+        <p:spPr/>
+        <p:txBody>
+          <a:bodyPr/>
+          <a:lstStyle/>
+          <a:p>
+            <a:r>
+              <a:rPr lang="en-US" dirty="0"/>
+              <a:t>Course Notes Posted to Moodle</a:t>
+            </a:r>
+          </a:p>
+          <a:p>
+            <a:r>
+              <a:rPr lang="en-US" dirty="0"/>
+              <a:t>Announcements made via Moodle</a:t>
+            </a:r>
+          </a:p>
+          <a:p>
+            <a:r>
+              <a:rPr lang="en-US" dirty="0"/>
+              <a:t>Homework submitted via Moodle</a:t>
+            </a:r>
+          </a:p>
+          <a:p>
+            <a:r>
+              <a:rPr lang="en-US" dirty="0"/>
+              <a:t>Class participation facilitated via Moodle</a:t>
+            </a:r>
+          </a:p>
+          <a:p>
+            <a:r>
+              <a:rPr lang="en-US" dirty="0"/>
+              <a:t>Grades posted to Moodle</a:t>
+            </a:r>
+          </a:p>
+        </p:txBody>
+      </p:sp>
+      <p:sp>
+        <p:nvSpPr>
+          <p:cNvPr id="4" name="TextBox 3">
+            <a:extLst>
+              <a:ext uri="{FF2B5EF4-FFF2-40B4-BE49-F238E27FC236}">
+                <a16:creationId xmlns:a16="http://schemas.microsoft.com/office/drawing/2014/main" id="{E7CBFD0A-BA31-986B-55F6-5053407B0B94}"/>
+              </a:ext>
+            </a:extLst>
+          </p:cNvPr>
+          <p:cNvSpPr txBox="1"/>
+          <p:nvPr/>
+        </p:nvSpPr>
+        <p:spPr>
+          <a:xfrm>
+            <a:off x="2464401" y="4722989"/>
+            <a:ext cx="6968895" cy="369332"/>
+          </a:xfrm>
+          <a:prstGeom prst="rect">
+            <a:avLst/>
+          </a:prstGeom>
+          <a:noFill/>
+          <a:ln>
+            <a:solidFill>
+              <a:schemeClr val="accent1"/>
+            </a:solidFill>
+          </a:ln>
+        </p:spPr>
+        <p:txBody>
+          <a:bodyPr wrap="none" rtlCol="0">
+            <a:spAutoFit/>
+          </a:bodyPr>
+          <a:lstStyle/>
+          <a:p>
+            <a:r>
+              <a:rPr lang="en-US" dirty="0"/>
+              <a:t>Class Participation is currently open at moodle31.upei.ca under CS 1910</a:t>
+            </a:r>
+          </a:p>
+        </p:txBody>
+      </p:sp>
+      <p:sp>
+        <p:nvSpPr>
+          <p:cNvPr id="5" name="TextBox 4">
+            <a:extLst>
+              <a:ext uri="{FF2B5EF4-FFF2-40B4-BE49-F238E27FC236}">
+                <a16:creationId xmlns:a16="http://schemas.microsoft.com/office/drawing/2014/main" id="{05F1B796-D673-9F46-716A-2DE67742298E}"/>
+              </a:ext>
+            </a:extLst>
+          </p:cNvPr>
+          <p:cNvSpPr txBox="1"/>
+          <p:nvPr/>
+        </p:nvSpPr>
+        <p:spPr>
+          <a:xfrm>
+            <a:off x="2464401" y="5207621"/>
+            <a:ext cx="7650877" cy="369332"/>
+          </a:xfrm>
+          <a:prstGeom prst="rect">
+            <a:avLst/>
+          </a:prstGeom>
+          <a:noFill/>
+          <a:ln>
+            <a:solidFill>
+              <a:schemeClr val="accent1"/>
+            </a:solidFill>
+          </a:ln>
+        </p:spPr>
+        <p:txBody>
+          <a:bodyPr wrap="none" rtlCol="0">
+            <a:spAutoFit/>
+          </a:bodyPr>
+          <a:lstStyle/>
+          <a:p>
+            <a:r>
+              <a:rPr lang="en-US" dirty="0"/>
+              <a:t>2 minute break to participate in today’s class by answering a couple of questions</a:t>
+            </a:r>
+          </a:p>
+        </p:txBody>
+      </p:sp>
+    </p:spTree>
+    <p:extLst>
+      <p:ext uri="{BB962C8B-B14F-4D97-AF65-F5344CB8AC3E}">
+        <p14:creationId xmlns:p14="http://schemas.microsoft.com/office/powerpoint/2010/main" val="3312545535"/>
+      </p:ext>
+    </p:extLst>
+  </p:cSld>
+  <p:clrMapOvr>
+    <a:masterClrMapping/>
+  </p:clrMapOvr>
+</p:sld>
+</file>
+
+<file path=ppt/slides/slide8.xml><?xml version="1.0" encoding="utf-8"?>
+<p:sld xmlns:a="http://schemas.openxmlformats.org/drawingml/2006/main" xmlns:r="http://schemas.openxmlformats.org/officeDocument/2006/relationships" xmlns:p="http://schemas.openxmlformats.org/presentationml/2006/main">
+  <p:cSld>
+    <p:spTree>
+      <p:nvGrpSpPr>
+        <p:cNvPr id="1" name=""/>
+        <p:cNvGrpSpPr/>
+        <p:nvPr/>
+      </p:nvGrpSpPr>
+      <p:grpSpPr>
+        <a:xfrm>
+          <a:off x="0" y="0"/>
+          <a:ext cx="0" cy="0"/>
+          <a:chOff x="0" y="0"/>
+          <a:chExt cx="0" cy="0"/>
+        </a:xfrm>
+      </p:grpSpPr>
+      <p:sp>
+        <p:nvSpPr>
+          <p:cNvPr id="2" name="Title 1">
+            <a:extLst>
+              <a:ext uri="{FF2B5EF4-FFF2-40B4-BE49-F238E27FC236}">
                 <a16:creationId xmlns:a16="http://schemas.microsoft.com/office/drawing/2014/main" id="{EE874699-05B7-4ADC-E52A-2767B61709E9}"/>
               </a:ext>
             </a:extLst>
@@ -16649,7 +16737,7 @@
 </p:sld>
 </file>
 
-<file path=ppt/slides/slide8.xml><?xml version="1.0" encoding="utf-8"?>
+<file path=ppt/slides/slide9.xml><?xml version="1.0" encoding="utf-8"?>
 <p:sld xmlns:a="http://schemas.openxmlformats.org/drawingml/2006/main" xmlns:r="http://schemas.openxmlformats.org/officeDocument/2006/relationships" xmlns:p="http://schemas.openxmlformats.org/presentationml/2006/main">
   <p:cSld>
     <p:spTree>
@@ -17063,7 +17151,7 @@
         </p:nvCxnSpPr>
         <p:spPr>
           <a:xfrm flipH="1">
-            <a:off x="5916706" y="3528508"/>
+            <a:off x="5916706" y="4304729"/>
             <a:ext cx="1635162" cy="0"/>
           </a:xfrm>
           <a:prstGeom prst="straightConnector1">
@@ -17102,7 +17190,7 @@
         </p:nvSpPr>
         <p:spPr>
           <a:xfrm>
-            <a:off x="7669996" y="3244334"/>
+            <a:off x="7669996" y="4020555"/>
             <a:ext cx="2281715" cy="369332"/>
           </a:xfrm>
           <a:prstGeom prst="rect">
@@ -17137,7 +17225,7 @@
         </p:nvCxnSpPr>
         <p:spPr>
           <a:xfrm flipH="1">
-            <a:off x="5916706" y="3885303"/>
+            <a:off x="5916706" y="4661524"/>
             <a:ext cx="1635162" cy="0"/>
           </a:xfrm>
           <a:prstGeom prst="straightConnector1">
@@ -17176,7 +17264,7 @@
         </p:nvSpPr>
         <p:spPr>
           <a:xfrm>
-            <a:off x="7669995" y="3654028"/>
+            <a:off x="7669995" y="4430249"/>
             <a:ext cx="2475229" cy="369332"/>
           </a:xfrm>
           <a:prstGeom prst="rect">
@@ -17281,147 +17369,6 @@
     <p:extLst>
       <p:ext uri="{BB962C8B-B14F-4D97-AF65-F5344CB8AC3E}">
         <p14:creationId xmlns:p14="http://schemas.microsoft.com/office/powerpoint/2010/main" val="122268572"/>
-      </p:ext>
-    </p:extLst>
-  </p:cSld>
-  <p:clrMapOvr>
-    <a:masterClrMapping/>
-  </p:clrMapOvr>
-</p:sld>
-</file>
-
-<file path=ppt/slides/slide9.xml><?xml version="1.0" encoding="utf-8"?>
-<p:sld xmlns:a="http://schemas.openxmlformats.org/drawingml/2006/main" xmlns:r="http://schemas.openxmlformats.org/officeDocument/2006/relationships" xmlns:p="http://schemas.openxmlformats.org/presentationml/2006/main">
-  <p:cSld>
-    <p:spTree>
-      <p:nvGrpSpPr>
-        <p:cNvPr id="1" name=""/>
-        <p:cNvGrpSpPr/>
-        <p:nvPr/>
-      </p:nvGrpSpPr>
-      <p:grpSpPr>
-        <a:xfrm>
-          <a:off x="0" y="0"/>
-          <a:ext cx="0" cy="0"/>
-          <a:chOff x="0" y="0"/>
-          <a:chExt cx="0" cy="0"/>
-        </a:xfrm>
-      </p:grpSpPr>
-      <p:sp>
-        <p:nvSpPr>
-          <p:cNvPr id="2" name="Title 1">
-            <a:extLst>
-              <a:ext uri="{FF2B5EF4-FFF2-40B4-BE49-F238E27FC236}">
-                <a16:creationId xmlns:a16="http://schemas.microsoft.com/office/drawing/2014/main" id="{5CD49EFB-A320-6F43-EFE2-0FCEF4CE506E}"/>
-              </a:ext>
-            </a:extLst>
-          </p:cNvPr>
-          <p:cNvSpPr>
-            <a:spLocks noGrp="1"/>
-          </p:cNvSpPr>
-          <p:nvPr>
-            <p:ph type="title"/>
-          </p:nvPr>
-        </p:nvSpPr>
-        <p:spPr>
-          <a:xfrm>
-            <a:off x="2231136" y="281028"/>
-            <a:ext cx="7729728" cy="1188720"/>
-          </a:xfrm>
-        </p:spPr>
-        <p:txBody>
-          <a:bodyPr/>
-          <a:lstStyle/>
-          <a:p>
-            <a:r>
-              <a:rPr lang="en-US" dirty="0"/>
-              <a:t>Pass the Tests</a:t>
-            </a:r>
-          </a:p>
-        </p:txBody>
-      </p:sp>
-      <p:sp>
-        <p:nvSpPr>
-          <p:cNvPr id="3" name="Content Placeholder 2">
-            <a:extLst>
-              <a:ext uri="{FF2B5EF4-FFF2-40B4-BE49-F238E27FC236}">
-                <a16:creationId xmlns:a16="http://schemas.microsoft.com/office/drawing/2014/main" id="{4D55D105-EFDE-539C-869F-B909057F0592}"/>
-              </a:ext>
-            </a:extLst>
-          </p:cNvPr>
-          <p:cNvSpPr>
-            <a:spLocks noGrp="1"/>
-          </p:cNvSpPr>
-          <p:nvPr>
-            <p:ph idx="1"/>
-          </p:nvPr>
-        </p:nvSpPr>
-        <p:spPr>
-          <a:xfrm>
-            <a:off x="2231136" y="1774919"/>
-            <a:ext cx="7729728" cy="4728431"/>
-          </a:xfrm>
-        </p:spPr>
-        <p:txBody>
-          <a:bodyPr>
-            <a:normAutofit/>
-          </a:bodyPr>
-          <a:lstStyle/>
-          <a:p>
-            <a:r>
-              <a:rPr lang="en-US" dirty="0"/>
-              <a:t>The pass the tests stipulation exists to ensure students moving beyond CS 1910 have demonstrated a basic level of understanding in the course content.</a:t>
-            </a:r>
-          </a:p>
-          <a:p>
-            <a:r>
-              <a:rPr lang="en-US" dirty="0"/>
-              <a:t>It also allows us to allocate a large number of points (35%) towards non-test grades so that students who struggle in testing environments can significantly boost their grade by performing well in other areas.</a:t>
-            </a:r>
-          </a:p>
-          <a:p>
-            <a:r>
-              <a:rPr lang="en-US" dirty="0"/>
-              <a:t>Example:</a:t>
-            </a:r>
-          </a:p>
-          <a:p>
-            <a:pPr lvl="1"/>
-            <a:r>
-              <a:rPr lang="en-US" dirty="0"/>
-              <a:t>Student A : Midterm 1 (40%), Midterm 2 (50%), Final Exam (55%), Labs (80%), Homework (80%), Participation (80%) </a:t>
-            </a:r>
-          </a:p>
-          <a:p>
-            <a:pPr lvl="2"/>
-            <a:r>
-              <a:rPr lang="en-US" dirty="0"/>
-              <a:t>Final Grade: 65% </a:t>
-            </a:r>
-          </a:p>
-          <a:p>
-            <a:pPr lvl="1"/>
-            <a:r>
-              <a:rPr lang="en-US" dirty="0"/>
-              <a:t>Student B: Midterm 1 (40%), Midterm 2 (60%), Final Exam (40%), Labs(100%), Homework (100%), Participation (100%)</a:t>
-            </a:r>
-          </a:p>
-          <a:p>
-            <a:pPr lvl="2"/>
-            <a:r>
-              <a:rPr lang="en-US" dirty="0"/>
-              <a:t>Final Grade 45% (student did not pass the tests portion of the course)</a:t>
-            </a:r>
-          </a:p>
-          <a:p>
-            <a:endParaRPr lang="en-US" dirty="0"/>
-          </a:p>
-        </p:txBody>
-      </p:sp>
-    </p:spTree>
-    <p:extLst>
-      <p:ext uri="{BB962C8B-B14F-4D97-AF65-F5344CB8AC3E}">
-        <p14:creationId xmlns:p14="http://schemas.microsoft.com/office/powerpoint/2010/main" val="1217478224"/>
       </p:ext>
     </p:extLst>
   </p:cSld>
